--- a/public/lessons/year-6-maths/autumn/week-8/solve-multi-step-addition-and-subtraction-problems/teaching-powerpoint-v1.pptx
+++ b/public/lessons/year-6-maths/autumn/week-8/solve-multi-step-addition-and-subtraction-problems/teaching-powerpoint-v1.pptx
@@ -2,24 +2,24 @@
 <file path=ppt/presentation.xml><?xml version="1.0" encoding="utf-8"?>
 <p:presentation xmlns:p="http://schemas.openxmlformats.org/presentationml/2006/main">
   <p:sldMasterIdLst>
-    <p:sldMasterId xmlns:r="http://schemas.openxmlformats.org/officeDocument/2006/relationships" id="2147483648" r:id="Ra145088ecec34987"/>
+    <p:sldMasterId xmlns:r="http://schemas.openxmlformats.org/officeDocument/2006/relationships" id="2147483648" r:id="Rb49093e79ab14945"/>
   </p:sldMasterIdLst>
   <p:notesMasterIdLst>
-    <p:notesMasterId xmlns:r="http://schemas.openxmlformats.org/officeDocument/2006/relationships" r:id="R965a7b4ce8ec4bf0"/>
+    <p:notesMasterId xmlns:r="http://schemas.openxmlformats.org/officeDocument/2006/relationships" r:id="R5af5488ac53849a9"/>
   </p:notesMasterIdLst>
   <p:sldIdLst>
-    <p:sldId xmlns:r="http://schemas.openxmlformats.org/officeDocument/2006/relationships" id="256" r:id="R5f97210f44c54bc6"/>
-    <p:sldId xmlns:r="http://schemas.openxmlformats.org/officeDocument/2006/relationships" id="257" r:id="Rb8261351a4d8425b"/>
-    <p:sldId xmlns:r="http://schemas.openxmlformats.org/officeDocument/2006/relationships" id="258" r:id="R8ddb525197984ae9"/>
-    <p:sldId xmlns:r="http://schemas.openxmlformats.org/officeDocument/2006/relationships" id="259" r:id="Ra82c65df4c8e43e6"/>
-    <p:sldId xmlns:r="http://schemas.openxmlformats.org/officeDocument/2006/relationships" id="260" r:id="Rf7ec16da47d84d6b"/>
-    <p:sldId xmlns:r="http://schemas.openxmlformats.org/officeDocument/2006/relationships" id="261" r:id="Re55c2e4532d24c1e"/>
-    <p:sldId xmlns:r="http://schemas.openxmlformats.org/officeDocument/2006/relationships" id="262" r:id="R805f8bf1c4a6464a"/>
-    <p:sldId xmlns:r="http://schemas.openxmlformats.org/officeDocument/2006/relationships" id="263" r:id="R0ff152745c7141f7"/>
-    <p:sldId xmlns:r="http://schemas.openxmlformats.org/officeDocument/2006/relationships" id="264" r:id="R8afb235b83dc41f5"/>
-    <p:sldId xmlns:r="http://schemas.openxmlformats.org/officeDocument/2006/relationships" id="265" r:id="R19919bda7b984992"/>
-    <p:sldId xmlns:r="http://schemas.openxmlformats.org/officeDocument/2006/relationships" id="266" r:id="R552331314eea4f1c"/>
-    <p:sldId xmlns:r="http://schemas.openxmlformats.org/officeDocument/2006/relationships" id="267" r:id="Re48cae754d1d475b"/>
+    <p:sldId xmlns:r="http://schemas.openxmlformats.org/officeDocument/2006/relationships" id="256" r:id="R0b14182444f44caf"/>
+    <p:sldId xmlns:r="http://schemas.openxmlformats.org/officeDocument/2006/relationships" id="257" r:id="Rb3eff99889084a76"/>
+    <p:sldId xmlns:r="http://schemas.openxmlformats.org/officeDocument/2006/relationships" id="258" r:id="Rffa424092e734ca5"/>
+    <p:sldId xmlns:r="http://schemas.openxmlformats.org/officeDocument/2006/relationships" id="259" r:id="Rda6a56cedaf1455a"/>
+    <p:sldId xmlns:r="http://schemas.openxmlformats.org/officeDocument/2006/relationships" id="260" r:id="R97156f1b0a1d4f7c"/>
+    <p:sldId xmlns:r="http://schemas.openxmlformats.org/officeDocument/2006/relationships" id="261" r:id="R4dfe565395874494"/>
+    <p:sldId xmlns:r="http://schemas.openxmlformats.org/officeDocument/2006/relationships" id="262" r:id="Rf920c1da42fb4de6"/>
+    <p:sldId xmlns:r="http://schemas.openxmlformats.org/officeDocument/2006/relationships" id="263" r:id="R6daa4e6a80614f8a"/>
+    <p:sldId xmlns:r="http://schemas.openxmlformats.org/officeDocument/2006/relationships" id="264" r:id="R944022c17fe34b26"/>
+    <p:sldId xmlns:r="http://schemas.openxmlformats.org/officeDocument/2006/relationships" id="265" r:id="Rdfde1d19660c4912"/>
+    <p:sldId xmlns:r="http://schemas.openxmlformats.org/officeDocument/2006/relationships" id="266" r:id="R7b684d80c7334bc4"/>
+    <p:sldId xmlns:r="http://schemas.openxmlformats.org/officeDocument/2006/relationships" id="267" r:id="R10e0ca827dcd41ef"/>
   </p:sldIdLst>
   <p:sldSz cx="12192000" cy="6858000"/>
   <p:notesSz cx="6858000" cy="9144000"/>
@@ -873,7 +873,7 @@
           <a:lstStyle xmlns:a="http://schemas.openxmlformats.org/drawingml/2006/main"/>
           <a:p xmlns:a="http://schemas.openxmlformats.org/drawingml/2006/main">
             <a:r>
-              <a:t>I do. Reveal the question, setup and each calculation stage one click at a time. Pupils watch before copying. Model answer: 36,435 seats.</a:t>
+              <a:t>I do. Reveal the question, then reveal each mathematical change one click at a time. Point to the numbers and operation that changed before moving to the next line. Final answer: 36,435 seats.</a:t>
             </a:r>
           </a:p>
         </p:txBody>
@@ -1291,7 +1291,7 @@
   </p:cSld>
   <p:clrMap bg1="lt1" tx1="dk1" bg2="lt2" tx2="dk2" accent1="accent1" accent2="accent2" accent3="accent3" accent4="accent4" accent5="accent5" accent6="accent6" hlink="hlink" folHlink="folHlink"/>
   <p:sldLayoutIdLst>
-    <p:sldLayoutId xmlns:r="http://schemas.openxmlformats.org/officeDocument/2006/relationships" id="2147483649" r:id="R7b3f169b70404bee"/>
+    <p:sldLayoutId xmlns:r="http://schemas.openxmlformats.org/officeDocument/2006/relationships" id="2147483649" r:id="Rd5fa884a7427499f"/>
   </p:sldLayoutIdLst>
   <p:txStyles>
     <p:titleStyle>
@@ -1842,7 +1842,7 @@
           <p:cNvPr id="12" name="">
             <a:extLst xmlns:a="http://schemas.openxmlformats.org/drawingml/2006/main">
               <a:ext uri="{FF2B5EF4-FFF2-40B4-BE49-F238E27FC236}">
-                <a16:creationId xmlns:a16="http://schemas.microsoft.com/office/drawing/2014/main" id="{AE60A6CE-187F-4A10-A631-889AF8E7F9D2}"/>
+                <a16:creationId xmlns:a16="http://schemas.microsoft.com/office/drawing/2014/main" id="{B38717CA-64D4-4DA6-9550-457947627E9A}"/>
               </a:ext>
             </a:extLst>
           </p:cNvPr>
@@ -1874,7 +1874,7 @@
           <p:cNvPr id="2" name="">
             <a:extLst xmlns:a="http://schemas.openxmlformats.org/drawingml/2006/main">
               <a:ext uri="{FF2B5EF4-FFF2-40B4-BE49-F238E27FC236}">
-                <a16:creationId xmlns:a16="http://schemas.microsoft.com/office/drawing/2014/main" id="{FDB8D88C-F1DF-41D1-A535-1DE78900D605}"/>
+                <a16:creationId xmlns:a16="http://schemas.microsoft.com/office/drawing/2014/main" id="{650360DD-A3DE-4432-8E5F-24653C7DB9C7}"/>
               </a:ext>
             </a:extLst>
           </p:cNvPr>
@@ -1931,7 +1931,7 @@
           <p:cNvPr id="3" name="">
             <a:extLst xmlns:a="http://schemas.openxmlformats.org/drawingml/2006/main">
               <a:ext uri="{FF2B5EF4-FFF2-40B4-BE49-F238E27FC236}">
-                <a16:creationId xmlns:a16="http://schemas.microsoft.com/office/drawing/2014/main" id="{3FB84100-0C2A-454A-8123-1A6AB0676939}"/>
+                <a16:creationId xmlns:a16="http://schemas.microsoft.com/office/drawing/2014/main" id="{99C6EF2F-F32A-46D4-81CB-C5AE2493F71C}"/>
               </a:ext>
             </a:extLst>
           </p:cNvPr>
@@ -1965,7 +1965,7 @@
           <p:cNvPr id="4" name="">
             <a:extLst xmlns:a="http://schemas.openxmlformats.org/drawingml/2006/main">
               <a:ext uri="{FF2B5EF4-FFF2-40B4-BE49-F238E27FC236}">
-                <a16:creationId xmlns:a16="http://schemas.microsoft.com/office/drawing/2014/main" id="{D936829C-507E-4EA3-AB36-DB43CD3A3AA0}"/>
+                <a16:creationId xmlns:a16="http://schemas.microsoft.com/office/drawing/2014/main" id="{87AE2504-2E8F-4D04-84B1-A7EFFEC4091D}"/>
               </a:ext>
             </a:extLst>
           </p:cNvPr>
@@ -2022,7 +2022,7 @@
           <p:cNvPr id="5" name="">
             <a:extLst xmlns:a="http://schemas.openxmlformats.org/drawingml/2006/main">
               <a:ext uri="{FF2B5EF4-FFF2-40B4-BE49-F238E27FC236}">
-                <a16:creationId xmlns:a16="http://schemas.microsoft.com/office/drawing/2014/main" id="{00B3D453-A27D-43A5-9C6C-A248DB8FA32D}"/>
+                <a16:creationId xmlns:a16="http://schemas.microsoft.com/office/drawing/2014/main" id="{E5E12F45-8DBB-49E6-BDB0-CC8E6F9F2555}"/>
               </a:ext>
             </a:extLst>
           </p:cNvPr>
@@ -2079,7 +2079,7 @@
           <p:cNvPr id="6" name="">
             <a:extLst xmlns:a="http://schemas.openxmlformats.org/drawingml/2006/main">
               <a:ext uri="{FF2B5EF4-FFF2-40B4-BE49-F238E27FC236}">
-                <a16:creationId xmlns:a16="http://schemas.microsoft.com/office/drawing/2014/main" id="{DD2B009E-D9CB-452A-8E1F-DE46E753ADE0}"/>
+                <a16:creationId xmlns:a16="http://schemas.microsoft.com/office/drawing/2014/main" id="{CB84F15F-F6A0-4AC7-A207-89AD57CA837B}"/>
               </a:ext>
             </a:extLst>
           </p:cNvPr>
@@ -2113,7 +2113,7 @@
           <p:cNvPr id="7" name="">
             <a:extLst xmlns:a="http://schemas.openxmlformats.org/drawingml/2006/main">
               <a:ext uri="{FF2B5EF4-FFF2-40B4-BE49-F238E27FC236}">
-                <a16:creationId xmlns:a16="http://schemas.microsoft.com/office/drawing/2014/main" id="{4A52A1D6-914E-495F-A1B3-D52A2506BC88}"/>
+                <a16:creationId xmlns:a16="http://schemas.microsoft.com/office/drawing/2014/main" id="{C5E6D0D8-AB8A-4C3B-92B7-1D171D7F05CD}"/>
               </a:ext>
             </a:extLst>
           </p:cNvPr>
@@ -2170,7 +2170,7 @@
           <p:cNvPr id="8" name="">
             <a:extLst xmlns:a="http://schemas.openxmlformats.org/drawingml/2006/main">
               <a:ext uri="{FF2B5EF4-FFF2-40B4-BE49-F238E27FC236}">
-                <a16:creationId xmlns:a16="http://schemas.microsoft.com/office/drawing/2014/main" id="{67B35367-39EA-4CCF-9A31-0E41EBC32611}"/>
+                <a16:creationId xmlns:a16="http://schemas.microsoft.com/office/drawing/2014/main" id="{6E3C9F0B-DED3-492D-A2F6-C270C8081A78}"/>
               </a:ext>
             </a:extLst>
           </p:cNvPr>
@@ -2227,7 +2227,7 @@
           <p:cNvPr id="9" name="">
             <a:extLst xmlns:a="http://schemas.openxmlformats.org/drawingml/2006/main">
               <a:ext uri="{FF2B5EF4-FFF2-40B4-BE49-F238E27FC236}">
-                <a16:creationId xmlns:a16="http://schemas.microsoft.com/office/drawing/2014/main" id="{E28D5EA3-0CAA-4C11-BDBC-C96363A6F226}"/>
+                <a16:creationId xmlns:a16="http://schemas.microsoft.com/office/drawing/2014/main" id="{8B609CA0-A2E2-4869-B2A4-C96D35C10EB1}"/>
               </a:ext>
             </a:extLst>
           </p:cNvPr>
@@ -2284,7 +2284,7 @@
           <p:cNvPr id="10" name="">
             <a:extLst xmlns:a="http://schemas.openxmlformats.org/drawingml/2006/main">
               <a:ext uri="{FF2B5EF4-FFF2-40B4-BE49-F238E27FC236}">
-                <a16:creationId xmlns:a16="http://schemas.microsoft.com/office/drawing/2014/main" id="{685956AC-114D-480B-89AA-DB612C8C7DD1}"/>
+                <a16:creationId xmlns:a16="http://schemas.microsoft.com/office/drawing/2014/main" id="{6597B48A-5D03-41F1-A019-DCF139D34E1C}"/>
               </a:ext>
             </a:extLst>
           </p:cNvPr>
@@ -2341,7 +2341,7 @@
           <p:cNvPr id="11" name="">
             <a:extLst xmlns:a="http://schemas.openxmlformats.org/drawingml/2006/main">
               <a:ext uri="{FF2B5EF4-FFF2-40B4-BE49-F238E27FC236}">
-                <a16:creationId xmlns:a16="http://schemas.microsoft.com/office/drawing/2014/main" id="{5C6E247E-4B68-481D-A432-1C9A079DAE6B}"/>
+                <a16:creationId xmlns:a16="http://schemas.microsoft.com/office/drawing/2014/main" id="{F15D84E3-1B34-4B92-A57F-942B061402EA}"/>
               </a:ext>
             </a:extLst>
           </p:cNvPr>
@@ -2396,7 +2396,7 @@
     </p:spTree>
     <p:extLst>
       <p:ext uri="{BB962C8B-B14F-4D97-AF65-F5344CB8AC3E}">
-        <p14:creationId xmlns:p14="http://schemas.microsoft.com/office/powerpoint/2010/main" val="1294410691"/>
+        <p14:creationId xmlns:p14="http://schemas.microsoft.com/office/powerpoint/2010/main" val="1929186834"/>
       </p:ext>
     </p:extLst>
   </p:cSld>
@@ -2427,7 +2427,7 @@
           <p:cNvPr id="14" name="">
             <a:extLst xmlns:a="http://schemas.openxmlformats.org/drawingml/2006/main">
               <a:ext uri="{FF2B5EF4-FFF2-40B4-BE49-F238E27FC236}">
-                <a16:creationId xmlns:a16="http://schemas.microsoft.com/office/drawing/2014/main" id="{E4DA3220-C0C4-494D-AC1C-CB8E254E525A}"/>
+                <a16:creationId xmlns:a16="http://schemas.microsoft.com/office/drawing/2014/main" id="{03178260-CAD9-4775-A496-05B7FDC7CDBF}"/>
               </a:ext>
             </a:extLst>
           </p:cNvPr>
@@ -2459,7 +2459,7 @@
           <p:cNvPr id="2" name="">
             <a:extLst xmlns:a="http://schemas.openxmlformats.org/drawingml/2006/main">
               <a:ext uri="{FF2B5EF4-FFF2-40B4-BE49-F238E27FC236}">
-                <a16:creationId xmlns:a16="http://schemas.microsoft.com/office/drawing/2014/main" id="{293CB6A2-A1D8-4EF3-A8B4-4E2CBF14066B}"/>
+                <a16:creationId xmlns:a16="http://schemas.microsoft.com/office/drawing/2014/main" id="{BA45A254-353B-4012-9219-32D49AE264A6}"/>
               </a:ext>
             </a:extLst>
           </p:cNvPr>
@@ -2516,7 +2516,7 @@
           <p:cNvPr id="3" name="">
             <a:extLst xmlns:a="http://schemas.openxmlformats.org/drawingml/2006/main">
               <a:ext uri="{FF2B5EF4-FFF2-40B4-BE49-F238E27FC236}">
-                <a16:creationId xmlns:a16="http://schemas.microsoft.com/office/drawing/2014/main" id="{97EF00D2-0953-4A25-982B-230211C9D75B}"/>
+                <a16:creationId xmlns:a16="http://schemas.microsoft.com/office/drawing/2014/main" id="{728F9C21-0E67-4840-92A1-349721A56AA9}"/>
               </a:ext>
             </a:extLst>
           </p:cNvPr>
@@ -2548,7 +2548,7 @@
           <p:cNvPr id="4" name="">
             <a:extLst xmlns:a="http://schemas.openxmlformats.org/drawingml/2006/main">
               <a:ext uri="{FF2B5EF4-FFF2-40B4-BE49-F238E27FC236}">
-                <a16:creationId xmlns:a16="http://schemas.microsoft.com/office/drawing/2014/main" id="{F9E6123F-5252-4ED7-8D2C-016113D824C5}"/>
+                <a16:creationId xmlns:a16="http://schemas.microsoft.com/office/drawing/2014/main" id="{A8C9CA3D-2BF1-4A4B-B544-1958DA40E2FC}"/>
               </a:ext>
             </a:extLst>
           </p:cNvPr>
@@ -2605,7 +2605,7 @@
           <p:cNvPr id="5" name="">
             <a:extLst xmlns:a="http://schemas.openxmlformats.org/drawingml/2006/main">
               <a:ext uri="{FF2B5EF4-FFF2-40B4-BE49-F238E27FC236}">
-                <a16:creationId xmlns:a16="http://schemas.microsoft.com/office/drawing/2014/main" id="{A1DDBDD0-C1B4-4592-8334-C9F785873ABE}"/>
+                <a16:creationId xmlns:a16="http://schemas.microsoft.com/office/drawing/2014/main" id="{AEEB8AF7-8A36-4AE6-B17F-BC8E577970DD}"/>
               </a:ext>
             </a:extLst>
           </p:cNvPr>
@@ -2662,7 +2662,7 @@
           <p:cNvPr id="6" name="">
             <a:extLst xmlns:a="http://schemas.openxmlformats.org/drawingml/2006/main">
               <a:ext uri="{FF2B5EF4-FFF2-40B4-BE49-F238E27FC236}">
-                <a16:creationId xmlns:a16="http://schemas.microsoft.com/office/drawing/2014/main" id="{32EF00B0-FD91-4897-A137-B9077F5E95D0}"/>
+                <a16:creationId xmlns:a16="http://schemas.microsoft.com/office/drawing/2014/main" id="{3232D2C7-8B08-4D43-9192-16C20FBD99EC}"/>
               </a:ext>
             </a:extLst>
           </p:cNvPr>
@@ -2719,7 +2719,7 @@
           <p:cNvPr id="7" name="">
             <a:extLst xmlns:a="http://schemas.openxmlformats.org/drawingml/2006/main">
               <a:ext uri="{FF2B5EF4-FFF2-40B4-BE49-F238E27FC236}">
-                <a16:creationId xmlns:a16="http://schemas.microsoft.com/office/drawing/2014/main" id="{6F385E2F-B609-4459-88A8-317504901603}"/>
+                <a16:creationId xmlns:a16="http://schemas.microsoft.com/office/drawing/2014/main" id="{17B90AFD-329E-411E-9046-A0D486DEC630}"/>
               </a:ext>
             </a:extLst>
           </p:cNvPr>
@@ -2751,7 +2751,7 @@
           <p:cNvPr id="8" name="">
             <a:extLst xmlns:a="http://schemas.openxmlformats.org/drawingml/2006/main">
               <a:ext uri="{FF2B5EF4-FFF2-40B4-BE49-F238E27FC236}">
-                <a16:creationId xmlns:a16="http://schemas.microsoft.com/office/drawing/2014/main" id="{4FA1A25F-183F-4918-967B-98B76DCEC5DD}"/>
+                <a16:creationId xmlns:a16="http://schemas.microsoft.com/office/drawing/2014/main" id="{1F5F0E64-9EA9-40F1-A268-E1C76D2B3783}"/>
               </a:ext>
             </a:extLst>
           </p:cNvPr>
@@ -2808,7 +2808,7 @@
           <p:cNvPr id="9" name="">
             <a:extLst xmlns:a="http://schemas.openxmlformats.org/drawingml/2006/main">
               <a:ext uri="{FF2B5EF4-FFF2-40B4-BE49-F238E27FC236}">
-                <a16:creationId xmlns:a16="http://schemas.microsoft.com/office/drawing/2014/main" id="{C13C25FD-521E-4140-B315-8806DB78577C}"/>
+                <a16:creationId xmlns:a16="http://schemas.microsoft.com/office/drawing/2014/main" id="{07B5344E-7A6C-4E8A-A6F6-776964BCEB03}"/>
               </a:ext>
             </a:extLst>
           </p:cNvPr>
@@ -2865,7 +2865,7 @@
           <p:cNvPr id="10" name="">
             <a:extLst xmlns:a="http://schemas.openxmlformats.org/drawingml/2006/main">
               <a:ext uri="{FF2B5EF4-FFF2-40B4-BE49-F238E27FC236}">
-                <a16:creationId xmlns:a16="http://schemas.microsoft.com/office/drawing/2014/main" id="{366B3BC5-64C6-4166-8601-EACCE3DCFAE5}"/>
+                <a16:creationId xmlns:a16="http://schemas.microsoft.com/office/drawing/2014/main" id="{4BADA698-9B60-427A-AF50-E75E091CBFC0}"/>
               </a:ext>
             </a:extLst>
           </p:cNvPr>
@@ -2922,7 +2922,7 @@
           <p:cNvPr id="11" name="">
             <a:extLst xmlns:a="http://schemas.openxmlformats.org/drawingml/2006/main">
               <a:ext uri="{FF2B5EF4-FFF2-40B4-BE49-F238E27FC236}">
-                <a16:creationId xmlns:a16="http://schemas.microsoft.com/office/drawing/2014/main" id="{659E1A51-C1BA-44D6-B46E-236BBE906022}"/>
+                <a16:creationId xmlns:a16="http://schemas.microsoft.com/office/drawing/2014/main" id="{FEE786D9-EE7A-4D0B-9929-CFD41C0FF93F}"/>
               </a:ext>
             </a:extLst>
           </p:cNvPr>
@@ -2979,7 +2979,7 @@
           <p:cNvPr id="12" name="">
             <a:extLst xmlns:a="http://schemas.openxmlformats.org/drawingml/2006/main">
               <a:ext uri="{FF2B5EF4-FFF2-40B4-BE49-F238E27FC236}">
-                <a16:creationId xmlns:a16="http://schemas.microsoft.com/office/drawing/2014/main" id="{65B1AA82-27FF-4120-91D4-66689D64DBE5}"/>
+                <a16:creationId xmlns:a16="http://schemas.microsoft.com/office/drawing/2014/main" id="{E999DE12-DA16-4914-AC72-6A1C9FC92FE1}"/>
               </a:ext>
             </a:extLst>
           </p:cNvPr>
@@ -3036,7 +3036,7 @@
           <p:cNvPr id="13" name="">
             <a:extLst xmlns:a="http://schemas.openxmlformats.org/drawingml/2006/main">
               <a:ext uri="{FF2B5EF4-FFF2-40B4-BE49-F238E27FC236}">
-                <a16:creationId xmlns:a16="http://schemas.microsoft.com/office/drawing/2014/main" id="{CBD8E967-BEFE-4E4F-92B2-F3567C31A27F}"/>
+                <a16:creationId xmlns:a16="http://schemas.microsoft.com/office/drawing/2014/main" id="{071CCB86-BF55-42BA-89C9-F906E453DB4C}"/>
               </a:ext>
             </a:extLst>
           </p:cNvPr>
@@ -3091,7 +3091,7 @@
     </p:spTree>
     <p:extLst>
       <p:ext uri="{BB962C8B-B14F-4D97-AF65-F5344CB8AC3E}">
-        <p14:creationId xmlns:p14="http://schemas.microsoft.com/office/powerpoint/2010/main" val="820590138"/>
+        <p14:creationId xmlns:p14="http://schemas.microsoft.com/office/powerpoint/2010/main" val="586935869"/>
       </p:ext>
     </p:extLst>
   </p:cSld>
@@ -3292,7 +3292,7 @@
           <p:cNvPr id="19" name="">
             <a:extLst xmlns:a="http://schemas.openxmlformats.org/drawingml/2006/main">
               <a:ext uri="{FF2B5EF4-FFF2-40B4-BE49-F238E27FC236}">
-                <a16:creationId xmlns:a16="http://schemas.microsoft.com/office/drawing/2014/main" id="{484C9715-61E4-4DA3-9382-1CBA08CEFF7F}"/>
+                <a16:creationId xmlns:a16="http://schemas.microsoft.com/office/drawing/2014/main" id="{4384A181-74CA-4601-A85E-BA736D8521F2}"/>
               </a:ext>
             </a:extLst>
           </p:cNvPr>
@@ -3324,7 +3324,7 @@
           <p:cNvPr id="2" name="">
             <a:extLst xmlns:a="http://schemas.openxmlformats.org/drawingml/2006/main">
               <a:ext uri="{FF2B5EF4-FFF2-40B4-BE49-F238E27FC236}">
-                <a16:creationId xmlns:a16="http://schemas.microsoft.com/office/drawing/2014/main" id="{305553AC-C8D7-4D6A-9DEF-D178142DBB04}"/>
+                <a16:creationId xmlns:a16="http://schemas.microsoft.com/office/drawing/2014/main" id="{4A7F8319-CC5D-4AD2-B078-CA05B5E25068}"/>
               </a:ext>
             </a:extLst>
           </p:cNvPr>
@@ -3381,7 +3381,7 @@
           <p:cNvPr id="3" name="">
             <a:extLst xmlns:a="http://schemas.openxmlformats.org/drawingml/2006/main">
               <a:ext uri="{FF2B5EF4-FFF2-40B4-BE49-F238E27FC236}">
-                <a16:creationId xmlns:a16="http://schemas.microsoft.com/office/drawing/2014/main" id="{6D2907B5-FDEF-4B5F-9BB1-A5A5FAED4D5D}"/>
+                <a16:creationId xmlns:a16="http://schemas.microsoft.com/office/drawing/2014/main" id="{2F8B02FA-F859-4333-83D4-A6C4BDF94F19}"/>
               </a:ext>
             </a:extLst>
           </p:cNvPr>
@@ -3413,7 +3413,7 @@
           <p:cNvPr id="4" name="">
             <a:extLst xmlns:a="http://schemas.openxmlformats.org/drawingml/2006/main">
               <a:ext uri="{FF2B5EF4-FFF2-40B4-BE49-F238E27FC236}">
-                <a16:creationId xmlns:a16="http://schemas.microsoft.com/office/drawing/2014/main" id="{425D9311-CAEF-41C1-8C93-9B465353E43F}"/>
+                <a16:creationId xmlns:a16="http://schemas.microsoft.com/office/drawing/2014/main" id="{C29721D3-11C2-42C8-A60A-9D45DA939991}"/>
               </a:ext>
             </a:extLst>
           </p:cNvPr>
@@ -3470,7 +3470,7 @@
           <p:cNvPr id="5" name="">
             <a:extLst xmlns:a="http://schemas.openxmlformats.org/drawingml/2006/main">
               <a:ext uri="{FF2B5EF4-FFF2-40B4-BE49-F238E27FC236}">
-                <a16:creationId xmlns:a16="http://schemas.microsoft.com/office/drawing/2014/main" id="{27010193-E31B-4214-9643-15D3ACDD8400}"/>
+                <a16:creationId xmlns:a16="http://schemas.microsoft.com/office/drawing/2014/main" id="{2BB68772-F2A6-46DE-8F0E-7F0DECD4D018}"/>
               </a:ext>
             </a:extLst>
           </p:cNvPr>
@@ -3527,7 +3527,7 @@
           <p:cNvPr id="6" name="">
             <a:extLst xmlns:a="http://schemas.openxmlformats.org/drawingml/2006/main">
               <a:ext uri="{FF2B5EF4-FFF2-40B4-BE49-F238E27FC236}">
-                <a16:creationId xmlns:a16="http://schemas.microsoft.com/office/drawing/2014/main" id="{CA5FCB73-0AA0-4AB8-ACEC-F7AB70AD09FF}"/>
+                <a16:creationId xmlns:a16="http://schemas.microsoft.com/office/drawing/2014/main" id="{18C8F538-4136-45FA-B445-892D51D34DC8}"/>
               </a:ext>
             </a:extLst>
           </p:cNvPr>
@@ -3584,7 +3584,7 @@
           <p:cNvPr id="7" name="">
             <a:extLst xmlns:a="http://schemas.openxmlformats.org/drawingml/2006/main">
               <a:ext uri="{FF2B5EF4-FFF2-40B4-BE49-F238E27FC236}">
-                <a16:creationId xmlns:a16="http://schemas.microsoft.com/office/drawing/2014/main" id="{20ACC31C-C88E-4757-8AB3-791ACCF18BB0}"/>
+                <a16:creationId xmlns:a16="http://schemas.microsoft.com/office/drawing/2014/main" id="{0913B995-8095-41A3-98D7-A7F93EC01504}"/>
               </a:ext>
             </a:extLst>
           </p:cNvPr>
@@ -3616,7 +3616,7 @@
           <p:cNvPr id="8" name="">
             <a:extLst xmlns:a="http://schemas.openxmlformats.org/drawingml/2006/main">
               <a:ext uri="{FF2B5EF4-FFF2-40B4-BE49-F238E27FC236}">
-                <a16:creationId xmlns:a16="http://schemas.microsoft.com/office/drawing/2014/main" id="{67D21FB3-1313-48F9-B042-8B5F4EBA3487}"/>
+                <a16:creationId xmlns:a16="http://schemas.microsoft.com/office/drawing/2014/main" id="{8290D075-EB51-4C99-AB45-115A48A13F5F}"/>
               </a:ext>
             </a:extLst>
           </p:cNvPr>
@@ -3673,7 +3673,7 @@
           <p:cNvPr id="9" name="">
             <a:extLst xmlns:a="http://schemas.openxmlformats.org/drawingml/2006/main">
               <a:ext uri="{FF2B5EF4-FFF2-40B4-BE49-F238E27FC236}">
-                <a16:creationId xmlns:a16="http://schemas.microsoft.com/office/drawing/2014/main" id="{07BFE896-7966-4356-85D9-35B21AFCD0F6}"/>
+                <a16:creationId xmlns:a16="http://schemas.microsoft.com/office/drawing/2014/main" id="{15F5C898-AAA6-48B9-8D59-658392259FB6}"/>
               </a:ext>
             </a:extLst>
           </p:cNvPr>
@@ -3730,7 +3730,7 @@
           <p:cNvPr id="10" name="">
             <a:extLst xmlns:a="http://schemas.openxmlformats.org/drawingml/2006/main">
               <a:ext uri="{FF2B5EF4-FFF2-40B4-BE49-F238E27FC236}">
-                <a16:creationId xmlns:a16="http://schemas.microsoft.com/office/drawing/2014/main" id="{6DDA7C38-4E62-436F-8514-09AA7B36CE8A}"/>
+                <a16:creationId xmlns:a16="http://schemas.microsoft.com/office/drawing/2014/main" id="{99D36635-429F-4A52-9F03-4E88FB49742F}"/>
               </a:ext>
             </a:extLst>
           </p:cNvPr>
@@ -3787,7 +3787,7 @@
           <p:cNvPr id="11" name="">
             <a:extLst xmlns:a="http://schemas.openxmlformats.org/drawingml/2006/main">
               <a:ext uri="{FF2B5EF4-FFF2-40B4-BE49-F238E27FC236}">
-                <a16:creationId xmlns:a16="http://schemas.microsoft.com/office/drawing/2014/main" id="{3F6E12A2-A79C-4489-ABA3-9D8E1C380924}"/>
+                <a16:creationId xmlns:a16="http://schemas.microsoft.com/office/drawing/2014/main" id="{EC55C404-7854-4A62-8704-509633BF1C3F}"/>
               </a:ext>
             </a:extLst>
           </p:cNvPr>
@@ -3821,7 +3821,7 @@
           <p:cNvPr id="12" name="">
             <a:extLst xmlns:a="http://schemas.openxmlformats.org/drawingml/2006/main">
               <a:ext uri="{FF2B5EF4-FFF2-40B4-BE49-F238E27FC236}">
-                <a16:creationId xmlns:a16="http://schemas.microsoft.com/office/drawing/2014/main" id="{F4DBA8E5-3ECB-49D1-B3B3-7FE06395C316}"/>
+                <a16:creationId xmlns:a16="http://schemas.microsoft.com/office/drawing/2014/main" id="{38FDF4C3-D553-4B69-BE63-2EEA2CE64CF1}"/>
               </a:ext>
             </a:extLst>
           </p:cNvPr>
@@ -3878,7 +3878,7 @@
           <p:cNvPr id="13" name="">
             <a:extLst xmlns:a="http://schemas.openxmlformats.org/drawingml/2006/main">
               <a:ext uri="{FF2B5EF4-FFF2-40B4-BE49-F238E27FC236}">
-                <a16:creationId xmlns:a16="http://schemas.microsoft.com/office/drawing/2014/main" id="{0CBCC6B0-1715-49E4-ACF4-27F0F015707F}"/>
+                <a16:creationId xmlns:a16="http://schemas.microsoft.com/office/drawing/2014/main" id="{970E2679-9837-47DD-B446-AFA14EB27EF9}"/>
               </a:ext>
             </a:extLst>
           </p:cNvPr>
@@ -3935,7 +3935,7 @@
           <p:cNvPr id="14" name="">
             <a:extLst xmlns:a="http://schemas.openxmlformats.org/drawingml/2006/main">
               <a:ext uri="{FF2B5EF4-FFF2-40B4-BE49-F238E27FC236}">
-                <a16:creationId xmlns:a16="http://schemas.microsoft.com/office/drawing/2014/main" id="{221DFB3A-5A4D-4DD5-A155-78196DD8E531}"/>
+                <a16:creationId xmlns:a16="http://schemas.microsoft.com/office/drawing/2014/main" id="{93184DC1-5370-444E-8AB2-28DB35023A95}"/>
               </a:ext>
             </a:extLst>
           </p:cNvPr>
@@ -3992,7 +3992,7 @@
           <p:cNvPr id="15" name="">
             <a:extLst xmlns:a="http://schemas.openxmlformats.org/drawingml/2006/main">
               <a:ext uri="{FF2B5EF4-FFF2-40B4-BE49-F238E27FC236}">
-                <a16:creationId xmlns:a16="http://schemas.microsoft.com/office/drawing/2014/main" id="{EE87C820-9E40-43F5-ABFD-FDE1C19EC28E}"/>
+                <a16:creationId xmlns:a16="http://schemas.microsoft.com/office/drawing/2014/main" id="{843D111E-2FB8-4168-A685-2ED1D9DA7CD6}"/>
               </a:ext>
             </a:extLst>
           </p:cNvPr>
@@ -4026,7 +4026,7 @@
           <p:cNvPr id="16" name="">
             <a:extLst xmlns:a="http://schemas.openxmlformats.org/drawingml/2006/main">
               <a:ext uri="{FF2B5EF4-FFF2-40B4-BE49-F238E27FC236}">
-                <a16:creationId xmlns:a16="http://schemas.microsoft.com/office/drawing/2014/main" id="{0A200617-C891-4AC6-B940-A6E6838170E2}"/>
+                <a16:creationId xmlns:a16="http://schemas.microsoft.com/office/drawing/2014/main" id="{AB5519E8-8C03-4AFA-AA71-B7EDD9B4126F}"/>
               </a:ext>
             </a:extLst>
           </p:cNvPr>
@@ -4083,7 +4083,7 @@
           <p:cNvPr id="17" name="">
             <a:extLst xmlns:a="http://schemas.openxmlformats.org/drawingml/2006/main">
               <a:ext uri="{FF2B5EF4-FFF2-40B4-BE49-F238E27FC236}">
-                <a16:creationId xmlns:a16="http://schemas.microsoft.com/office/drawing/2014/main" id="{CA8C053E-D977-45AF-AB31-6D63E31836E4}"/>
+                <a16:creationId xmlns:a16="http://schemas.microsoft.com/office/drawing/2014/main" id="{87D114C0-D655-4B65-84FA-7C72CB7026F4}"/>
               </a:ext>
             </a:extLst>
           </p:cNvPr>
@@ -4140,7 +4140,7 @@
           <p:cNvPr id="18" name="">
             <a:extLst xmlns:a="http://schemas.openxmlformats.org/drawingml/2006/main">
               <a:ext uri="{FF2B5EF4-FFF2-40B4-BE49-F238E27FC236}">
-                <a16:creationId xmlns:a16="http://schemas.microsoft.com/office/drawing/2014/main" id="{0C4D1B78-7B97-4258-9524-EB7A0676534B}"/>
+                <a16:creationId xmlns:a16="http://schemas.microsoft.com/office/drawing/2014/main" id="{8EE3656D-0E19-4FE6-9148-9452C8248980}"/>
               </a:ext>
             </a:extLst>
           </p:cNvPr>
@@ -4195,7 +4195,7 @@
     </p:spTree>
     <p:extLst>
       <p:ext uri="{BB962C8B-B14F-4D97-AF65-F5344CB8AC3E}">
-        <p14:creationId xmlns:p14="http://schemas.microsoft.com/office/powerpoint/2010/main" val="355495595"/>
+        <p14:creationId xmlns:p14="http://schemas.microsoft.com/office/powerpoint/2010/main" val="1303986512"/>
       </p:ext>
     </p:extLst>
   </p:cSld>
@@ -4350,7 +4350,7 @@
           <p:cNvPr id="23" name="">
             <a:extLst xmlns:a="http://schemas.openxmlformats.org/drawingml/2006/main">
               <a:ext uri="{FF2B5EF4-FFF2-40B4-BE49-F238E27FC236}">
-                <a16:creationId xmlns:a16="http://schemas.microsoft.com/office/drawing/2014/main" id="{61F9B296-2431-4705-9866-7045DBBA3499}"/>
+                <a16:creationId xmlns:a16="http://schemas.microsoft.com/office/drawing/2014/main" id="{543206CD-5BAB-4277-BBEC-CA6CA410A033}"/>
               </a:ext>
             </a:extLst>
           </p:cNvPr>
@@ -4382,7 +4382,7 @@
           <p:cNvPr id="2" name="">
             <a:extLst xmlns:a="http://schemas.openxmlformats.org/drawingml/2006/main">
               <a:ext uri="{FF2B5EF4-FFF2-40B4-BE49-F238E27FC236}">
-                <a16:creationId xmlns:a16="http://schemas.microsoft.com/office/drawing/2014/main" id="{7B9505A2-2727-4F97-BE10-998083CA959F}"/>
+                <a16:creationId xmlns:a16="http://schemas.microsoft.com/office/drawing/2014/main" id="{28A35576-4355-47B4-B44C-6BE2C845E218}"/>
               </a:ext>
             </a:extLst>
           </p:cNvPr>
@@ -4439,7 +4439,7 @@
           <p:cNvPr id="3" name="">
             <a:extLst xmlns:a="http://schemas.openxmlformats.org/drawingml/2006/main">
               <a:ext uri="{FF2B5EF4-FFF2-40B4-BE49-F238E27FC236}">
-                <a16:creationId xmlns:a16="http://schemas.microsoft.com/office/drawing/2014/main" id="{8F69E990-59E6-4C23-9B7C-31250423EBF4}"/>
+                <a16:creationId xmlns:a16="http://schemas.microsoft.com/office/drawing/2014/main" id="{8900259D-1D96-487D-AAD8-2C5C63CBC2D1}"/>
               </a:ext>
             </a:extLst>
           </p:cNvPr>
@@ -4471,7 +4471,7 @@
           <p:cNvPr id="4" name="">
             <a:extLst xmlns:a="http://schemas.openxmlformats.org/drawingml/2006/main">
               <a:ext uri="{FF2B5EF4-FFF2-40B4-BE49-F238E27FC236}">
-                <a16:creationId xmlns:a16="http://schemas.microsoft.com/office/drawing/2014/main" id="{C8E4E29F-F744-4120-B0B8-80F5DDD3E062}"/>
+                <a16:creationId xmlns:a16="http://schemas.microsoft.com/office/drawing/2014/main" id="{FA906354-72A3-4368-948E-A4A83E65433C}"/>
               </a:ext>
             </a:extLst>
           </p:cNvPr>
@@ -4528,7 +4528,7 @@
           <p:cNvPr id="5" name="">
             <a:extLst xmlns:a="http://schemas.openxmlformats.org/drawingml/2006/main">
               <a:ext uri="{FF2B5EF4-FFF2-40B4-BE49-F238E27FC236}">
-                <a16:creationId xmlns:a16="http://schemas.microsoft.com/office/drawing/2014/main" id="{1D4C5F76-6D67-490B-B4BD-189622F4F341}"/>
+                <a16:creationId xmlns:a16="http://schemas.microsoft.com/office/drawing/2014/main" id="{6203E49F-4D95-416C-9669-B981E9756DCD}"/>
               </a:ext>
             </a:extLst>
           </p:cNvPr>
@@ -4585,7 +4585,7 @@
           <p:cNvPr id="6" name="">
             <a:extLst xmlns:a="http://schemas.openxmlformats.org/drawingml/2006/main">
               <a:ext uri="{FF2B5EF4-FFF2-40B4-BE49-F238E27FC236}">
-                <a16:creationId xmlns:a16="http://schemas.microsoft.com/office/drawing/2014/main" id="{F1ECB9A5-C947-43AA-A11F-88DA2102FE6B}"/>
+                <a16:creationId xmlns:a16="http://schemas.microsoft.com/office/drawing/2014/main" id="{F8A0BA09-4448-4B9B-A013-CB81A1634AF2}"/>
               </a:ext>
             </a:extLst>
           </p:cNvPr>
@@ -4642,7 +4642,7 @@
           <p:cNvPr id="7" name="">
             <a:extLst xmlns:a="http://schemas.openxmlformats.org/drawingml/2006/main">
               <a:ext uri="{FF2B5EF4-FFF2-40B4-BE49-F238E27FC236}">
-                <a16:creationId xmlns:a16="http://schemas.microsoft.com/office/drawing/2014/main" id="{BCB6A884-BF3B-45A4-B166-89B484A26FB9}"/>
+                <a16:creationId xmlns:a16="http://schemas.microsoft.com/office/drawing/2014/main" id="{508FBA98-2970-4EAE-A2B5-3743D5F0A930}"/>
               </a:ext>
             </a:extLst>
           </p:cNvPr>
@@ -4674,7 +4674,7 @@
           <p:cNvPr id="8" name="">
             <a:extLst xmlns:a="http://schemas.openxmlformats.org/drawingml/2006/main">
               <a:ext uri="{FF2B5EF4-FFF2-40B4-BE49-F238E27FC236}">
-                <a16:creationId xmlns:a16="http://schemas.microsoft.com/office/drawing/2014/main" id="{7B198E7E-7389-4817-A58D-EB4084EAF7BE}"/>
+                <a16:creationId xmlns:a16="http://schemas.microsoft.com/office/drawing/2014/main" id="{0597C36D-BC68-4276-A447-DD1EE56A0A8F}"/>
               </a:ext>
             </a:extLst>
           </p:cNvPr>
@@ -4731,7 +4731,7 @@
           <p:cNvPr id="9" name="">
             <a:extLst xmlns:a="http://schemas.openxmlformats.org/drawingml/2006/main">
               <a:ext uri="{FF2B5EF4-FFF2-40B4-BE49-F238E27FC236}">
-                <a16:creationId xmlns:a16="http://schemas.microsoft.com/office/drawing/2014/main" id="{A46B9711-B12B-4FE5-A0BD-DBCD214FC80C}"/>
+                <a16:creationId xmlns:a16="http://schemas.microsoft.com/office/drawing/2014/main" id="{17FD9AA4-F5DC-4BB1-AFD4-4856895CE79F}"/>
               </a:ext>
             </a:extLst>
           </p:cNvPr>
@@ -4788,7 +4788,7 @@
           <p:cNvPr id="10" name="">
             <a:extLst xmlns:a="http://schemas.openxmlformats.org/drawingml/2006/main">
               <a:ext uri="{FF2B5EF4-FFF2-40B4-BE49-F238E27FC236}">
-                <a16:creationId xmlns:a16="http://schemas.microsoft.com/office/drawing/2014/main" id="{6450D382-C67B-4977-B866-BC6FCFD59CFF}"/>
+                <a16:creationId xmlns:a16="http://schemas.microsoft.com/office/drawing/2014/main" id="{BF3524CA-31D4-4621-943E-5BFD26861029}"/>
               </a:ext>
             </a:extLst>
           </p:cNvPr>
@@ -4822,7 +4822,7 @@
           <p:cNvPr id="11" name="">
             <a:extLst xmlns:a="http://schemas.openxmlformats.org/drawingml/2006/main">
               <a:ext uri="{FF2B5EF4-FFF2-40B4-BE49-F238E27FC236}">
-                <a16:creationId xmlns:a16="http://schemas.microsoft.com/office/drawing/2014/main" id="{45247EE3-FB5E-4FC1-A98F-C1697E798ED3}"/>
+                <a16:creationId xmlns:a16="http://schemas.microsoft.com/office/drawing/2014/main" id="{07996388-BFE3-4929-9678-752E873627A0}"/>
               </a:ext>
             </a:extLst>
           </p:cNvPr>
@@ -4854,7 +4854,7 @@
           <p:cNvPr id="12" name="">
             <a:extLst xmlns:a="http://schemas.openxmlformats.org/drawingml/2006/main">
               <a:ext uri="{FF2B5EF4-FFF2-40B4-BE49-F238E27FC236}">
-                <a16:creationId xmlns:a16="http://schemas.microsoft.com/office/drawing/2014/main" id="{BD6A1EAC-8B0C-4A84-A4C9-FE96A204F2FC}"/>
+                <a16:creationId xmlns:a16="http://schemas.microsoft.com/office/drawing/2014/main" id="{0FCBAC28-D0D0-4DFA-BDD4-F1739399A138}"/>
               </a:ext>
             </a:extLst>
           </p:cNvPr>
@@ -4911,7 +4911,7 @@
           <p:cNvPr id="13" name="">
             <a:extLst xmlns:a="http://schemas.openxmlformats.org/drawingml/2006/main">
               <a:ext uri="{FF2B5EF4-FFF2-40B4-BE49-F238E27FC236}">
-                <a16:creationId xmlns:a16="http://schemas.microsoft.com/office/drawing/2014/main" id="{523C8611-9D80-4D98-BA2F-794BFB81B063}"/>
+                <a16:creationId xmlns:a16="http://schemas.microsoft.com/office/drawing/2014/main" id="{E34326F5-4074-44A0-83D2-A067794700F1}"/>
               </a:ext>
             </a:extLst>
           </p:cNvPr>
@@ -4968,7 +4968,7 @@
           <p:cNvPr id="14" name="">
             <a:extLst xmlns:a="http://schemas.openxmlformats.org/drawingml/2006/main">
               <a:ext uri="{FF2B5EF4-FFF2-40B4-BE49-F238E27FC236}">
-                <a16:creationId xmlns:a16="http://schemas.microsoft.com/office/drawing/2014/main" id="{23BE2B22-C836-4E91-86E7-2D190B11F816}"/>
+                <a16:creationId xmlns:a16="http://schemas.microsoft.com/office/drawing/2014/main" id="{C0908F60-AF2C-4BB8-BB0F-71747658778E}"/>
               </a:ext>
             </a:extLst>
           </p:cNvPr>
@@ -5002,7 +5002,7 @@
           <p:cNvPr id="15" name="">
             <a:extLst xmlns:a="http://schemas.openxmlformats.org/drawingml/2006/main">
               <a:ext uri="{FF2B5EF4-FFF2-40B4-BE49-F238E27FC236}">
-                <a16:creationId xmlns:a16="http://schemas.microsoft.com/office/drawing/2014/main" id="{8D5DC2B3-EC97-478D-AD54-359EB07CE8B7}"/>
+                <a16:creationId xmlns:a16="http://schemas.microsoft.com/office/drawing/2014/main" id="{FC4D71F4-6ED9-4497-B823-4E83C70452C9}"/>
               </a:ext>
             </a:extLst>
           </p:cNvPr>
@@ -5034,7 +5034,7 @@
           <p:cNvPr id="16" name="">
             <a:extLst xmlns:a="http://schemas.openxmlformats.org/drawingml/2006/main">
               <a:ext uri="{FF2B5EF4-FFF2-40B4-BE49-F238E27FC236}">
-                <a16:creationId xmlns:a16="http://schemas.microsoft.com/office/drawing/2014/main" id="{A015BD0A-3994-4ACD-A6A7-D599170A4AE4}"/>
+                <a16:creationId xmlns:a16="http://schemas.microsoft.com/office/drawing/2014/main" id="{5FCEB4E0-A5E3-49EC-B897-C66F481642C8}"/>
               </a:ext>
             </a:extLst>
           </p:cNvPr>
@@ -5091,7 +5091,7 @@
           <p:cNvPr id="17" name="">
             <a:extLst xmlns:a="http://schemas.openxmlformats.org/drawingml/2006/main">
               <a:ext uri="{FF2B5EF4-FFF2-40B4-BE49-F238E27FC236}">
-                <a16:creationId xmlns:a16="http://schemas.microsoft.com/office/drawing/2014/main" id="{9B39FF2D-9122-4F44-A919-65C2DBD7EED0}"/>
+                <a16:creationId xmlns:a16="http://schemas.microsoft.com/office/drawing/2014/main" id="{371B8B15-3F68-409E-926D-54309ECFB021}"/>
               </a:ext>
             </a:extLst>
           </p:cNvPr>
@@ -5148,7 +5148,7 @@
           <p:cNvPr id="18" name="">
             <a:extLst xmlns:a="http://schemas.openxmlformats.org/drawingml/2006/main">
               <a:ext uri="{FF2B5EF4-FFF2-40B4-BE49-F238E27FC236}">
-                <a16:creationId xmlns:a16="http://schemas.microsoft.com/office/drawing/2014/main" id="{F572ABFF-3688-42CB-BAB5-29E861D69C0F}"/>
+                <a16:creationId xmlns:a16="http://schemas.microsoft.com/office/drawing/2014/main" id="{BC58D931-DF90-4C77-B46F-FFF9919139E8}"/>
               </a:ext>
             </a:extLst>
           </p:cNvPr>
@@ -5182,7 +5182,7 @@
           <p:cNvPr id="19" name="">
             <a:extLst xmlns:a="http://schemas.openxmlformats.org/drawingml/2006/main">
               <a:ext uri="{FF2B5EF4-FFF2-40B4-BE49-F238E27FC236}">
-                <a16:creationId xmlns:a16="http://schemas.microsoft.com/office/drawing/2014/main" id="{E057A396-6034-49AE-9925-4456EE569041}"/>
+                <a16:creationId xmlns:a16="http://schemas.microsoft.com/office/drawing/2014/main" id="{194E08D4-AED9-4BC0-A59C-C19EAF011FE0}"/>
               </a:ext>
             </a:extLst>
           </p:cNvPr>
@@ -5214,7 +5214,7 @@
           <p:cNvPr id="20" name="">
             <a:extLst xmlns:a="http://schemas.openxmlformats.org/drawingml/2006/main">
               <a:ext uri="{FF2B5EF4-FFF2-40B4-BE49-F238E27FC236}">
-                <a16:creationId xmlns:a16="http://schemas.microsoft.com/office/drawing/2014/main" id="{DAAE6CDF-3E9F-4222-967E-4F9E54E499F2}"/>
+                <a16:creationId xmlns:a16="http://schemas.microsoft.com/office/drawing/2014/main" id="{8CFD4B0B-931C-44C5-8458-0EC3A61F707D}"/>
               </a:ext>
             </a:extLst>
           </p:cNvPr>
@@ -5271,7 +5271,7 @@
           <p:cNvPr id="21" name="">
             <a:extLst xmlns:a="http://schemas.openxmlformats.org/drawingml/2006/main">
               <a:ext uri="{FF2B5EF4-FFF2-40B4-BE49-F238E27FC236}">
-                <a16:creationId xmlns:a16="http://schemas.microsoft.com/office/drawing/2014/main" id="{E219280C-5A10-400D-9E2B-8F59F5E52664}"/>
+                <a16:creationId xmlns:a16="http://schemas.microsoft.com/office/drawing/2014/main" id="{B3D267F6-BC63-49D8-91B5-6FA2111885C8}"/>
               </a:ext>
             </a:extLst>
           </p:cNvPr>
@@ -5328,7 +5328,7 @@
           <p:cNvPr id="22" name="">
             <a:extLst xmlns:a="http://schemas.openxmlformats.org/drawingml/2006/main">
               <a:ext uri="{FF2B5EF4-FFF2-40B4-BE49-F238E27FC236}">
-                <a16:creationId xmlns:a16="http://schemas.microsoft.com/office/drawing/2014/main" id="{D83354CB-C484-4019-9155-DF6BC336EE7B}"/>
+                <a16:creationId xmlns:a16="http://schemas.microsoft.com/office/drawing/2014/main" id="{4176F2BC-259E-400B-8FD9-84A4FB22702A}"/>
               </a:ext>
             </a:extLst>
           </p:cNvPr>
@@ -5383,7 +5383,7 @@
     </p:spTree>
     <p:extLst>
       <p:ext uri="{BB962C8B-B14F-4D97-AF65-F5344CB8AC3E}">
-        <p14:creationId xmlns:p14="http://schemas.microsoft.com/office/powerpoint/2010/main" val="1586807541"/>
+        <p14:creationId xmlns:p14="http://schemas.microsoft.com/office/powerpoint/2010/main" val="96108245"/>
       </p:ext>
     </p:extLst>
   </p:cSld>
@@ -5584,7 +5584,7 @@
           <p:cNvPr id="23" name="">
             <a:extLst xmlns:a="http://schemas.openxmlformats.org/drawingml/2006/main">
               <a:ext uri="{FF2B5EF4-FFF2-40B4-BE49-F238E27FC236}">
-                <a16:creationId xmlns:a16="http://schemas.microsoft.com/office/drawing/2014/main" id="{86CF8736-8EEB-4FFE-885A-04DC5D05598C}"/>
+                <a16:creationId xmlns:a16="http://schemas.microsoft.com/office/drawing/2014/main" id="{3EA74665-8DAE-441D-B7C6-9FBBCE43FC25}"/>
               </a:ext>
             </a:extLst>
           </p:cNvPr>
@@ -5616,7 +5616,7 @@
           <p:cNvPr id="2" name="">
             <a:extLst xmlns:a="http://schemas.openxmlformats.org/drawingml/2006/main">
               <a:ext uri="{FF2B5EF4-FFF2-40B4-BE49-F238E27FC236}">
-                <a16:creationId xmlns:a16="http://schemas.microsoft.com/office/drawing/2014/main" id="{E021477F-5EB4-4CC4-9686-3F5BFA3858F6}"/>
+                <a16:creationId xmlns:a16="http://schemas.microsoft.com/office/drawing/2014/main" id="{E0B6753C-2E82-4155-8138-A35CB0FE63E0}"/>
               </a:ext>
             </a:extLst>
           </p:cNvPr>
@@ -5673,7 +5673,7 @@
           <p:cNvPr id="3" name="">
             <a:extLst xmlns:a="http://schemas.openxmlformats.org/drawingml/2006/main">
               <a:ext uri="{FF2B5EF4-FFF2-40B4-BE49-F238E27FC236}">
-                <a16:creationId xmlns:a16="http://schemas.microsoft.com/office/drawing/2014/main" id="{688CDC7B-A227-455E-BB18-B3B70F99A25E}"/>
+                <a16:creationId xmlns:a16="http://schemas.microsoft.com/office/drawing/2014/main" id="{72F4EB0F-2882-4402-ACD7-FB85D22A8D9C}"/>
               </a:ext>
             </a:extLst>
           </p:cNvPr>
@@ -5705,7 +5705,7 @@
           <p:cNvPr id="4" name="">
             <a:extLst xmlns:a="http://schemas.openxmlformats.org/drawingml/2006/main">
               <a:ext uri="{FF2B5EF4-FFF2-40B4-BE49-F238E27FC236}">
-                <a16:creationId xmlns:a16="http://schemas.microsoft.com/office/drawing/2014/main" id="{31A09DA2-27F4-48F4-BCED-755961F235D6}"/>
+                <a16:creationId xmlns:a16="http://schemas.microsoft.com/office/drawing/2014/main" id="{892DF8FA-54FE-461F-A528-52823D9E25E8}"/>
               </a:ext>
             </a:extLst>
           </p:cNvPr>
@@ -5762,7 +5762,7 @@
           <p:cNvPr id="5" name="">
             <a:extLst xmlns:a="http://schemas.openxmlformats.org/drawingml/2006/main">
               <a:ext uri="{FF2B5EF4-FFF2-40B4-BE49-F238E27FC236}">
-                <a16:creationId xmlns:a16="http://schemas.microsoft.com/office/drawing/2014/main" id="{4E613FBC-9BA1-4095-9F70-B6E716C921F1}"/>
+                <a16:creationId xmlns:a16="http://schemas.microsoft.com/office/drawing/2014/main" id="{0E0B6C01-880C-405C-B0E4-43CD64209F6E}"/>
               </a:ext>
             </a:extLst>
           </p:cNvPr>
@@ -5819,7 +5819,7 @@
           <p:cNvPr id="6" name="">
             <a:extLst xmlns:a="http://schemas.openxmlformats.org/drawingml/2006/main">
               <a:ext uri="{FF2B5EF4-FFF2-40B4-BE49-F238E27FC236}">
-                <a16:creationId xmlns:a16="http://schemas.microsoft.com/office/drawing/2014/main" id="{DFD7263A-904D-4C1D-A3D4-535BDC669A6A}"/>
+                <a16:creationId xmlns:a16="http://schemas.microsoft.com/office/drawing/2014/main" id="{D3461F26-278D-4F4C-9E99-3DAA6814E7C3}"/>
               </a:ext>
             </a:extLst>
           </p:cNvPr>
@@ -5876,7 +5876,7 @@
           <p:cNvPr id="7" name="">
             <a:extLst xmlns:a="http://schemas.openxmlformats.org/drawingml/2006/main">
               <a:ext uri="{FF2B5EF4-FFF2-40B4-BE49-F238E27FC236}">
-                <a16:creationId xmlns:a16="http://schemas.microsoft.com/office/drawing/2014/main" id="{A4BD6BDD-4C87-4A20-AFC5-14D8D6542C62}"/>
+                <a16:creationId xmlns:a16="http://schemas.microsoft.com/office/drawing/2014/main" id="{BF41EEB2-BB30-4EC8-BA7D-BB279BF7555F}"/>
               </a:ext>
             </a:extLst>
           </p:cNvPr>
@@ -5908,7 +5908,7 @@
           <p:cNvPr id="8" name="">
             <a:extLst xmlns:a="http://schemas.openxmlformats.org/drawingml/2006/main">
               <a:ext uri="{FF2B5EF4-FFF2-40B4-BE49-F238E27FC236}">
-                <a16:creationId xmlns:a16="http://schemas.microsoft.com/office/drawing/2014/main" id="{C2A47A2F-B717-4F89-94EE-F258AFDB7CF4}"/>
+                <a16:creationId xmlns:a16="http://schemas.microsoft.com/office/drawing/2014/main" id="{67CB19AF-F97A-4F39-9505-EA3000D36832}"/>
               </a:ext>
             </a:extLst>
           </p:cNvPr>
@@ -5965,7 +5965,7 @@
           <p:cNvPr id="9" name="">
             <a:extLst xmlns:a="http://schemas.openxmlformats.org/drawingml/2006/main">
               <a:ext uri="{FF2B5EF4-FFF2-40B4-BE49-F238E27FC236}">
-                <a16:creationId xmlns:a16="http://schemas.microsoft.com/office/drawing/2014/main" id="{4F2F53B3-5829-478F-9303-33B8FB209A9C}"/>
+                <a16:creationId xmlns:a16="http://schemas.microsoft.com/office/drawing/2014/main" id="{367A352B-4C55-44B3-977E-64A503F60646}"/>
               </a:ext>
             </a:extLst>
           </p:cNvPr>
@@ -6022,7 +6022,7 @@
           <p:cNvPr id="10" name="">
             <a:extLst xmlns:a="http://schemas.openxmlformats.org/drawingml/2006/main">
               <a:ext uri="{FF2B5EF4-FFF2-40B4-BE49-F238E27FC236}">
-                <a16:creationId xmlns:a16="http://schemas.microsoft.com/office/drawing/2014/main" id="{1B4E0CD9-C490-48D7-9094-50052E728F83}"/>
+                <a16:creationId xmlns:a16="http://schemas.microsoft.com/office/drawing/2014/main" id="{147CAADE-9EE1-4838-B144-ADCF2CE48F9D}"/>
               </a:ext>
             </a:extLst>
           </p:cNvPr>
@@ -6056,7 +6056,7 @@
           <p:cNvPr id="11" name="">
             <a:extLst xmlns:a="http://schemas.openxmlformats.org/drawingml/2006/main">
               <a:ext uri="{FF2B5EF4-FFF2-40B4-BE49-F238E27FC236}">
-                <a16:creationId xmlns:a16="http://schemas.microsoft.com/office/drawing/2014/main" id="{3BBEAE33-0244-4A39-8B01-B8D2D8B8C61D}"/>
+                <a16:creationId xmlns:a16="http://schemas.microsoft.com/office/drawing/2014/main" id="{3CBB4CE0-A102-49E7-8EC0-8AC79C611E6A}"/>
               </a:ext>
             </a:extLst>
           </p:cNvPr>
@@ -6088,7 +6088,7 @@
           <p:cNvPr id="12" name="">
             <a:extLst xmlns:a="http://schemas.openxmlformats.org/drawingml/2006/main">
               <a:ext uri="{FF2B5EF4-FFF2-40B4-BE49-F238E27FC236}">
-                <a16:creationId xmlns:a16="http://schemas.microsoft.com/office/drawing/2014/main" id="{9DC1163A-C379-48E4-82E3-A04A2C3269BE}"/>
+                <a16:creationId xmlns:a16="http://schemas.microsoft.com/office/drawing/2014/main" id="{1469945A-CE7B-4F15-9678-402AA0ED662D}"/>
               </a:ext>
             </a:extLst>
           </p:cNvPr>
@@ -6145,7 +6145,7 @@
           <p:cNvPr id="13" name="">
             <a:extLst xmlns:a="http://schemas.openxmlformats.org/drawingml/2006/main">
               <a:ext uri="{FF2B5EF4-FFF2-40B4-BE49-F238E27FC236}">
-                <a16:creationId xmlns:a16="http://schemas.microsoft.com/office/drawing/2014/main" id="{B3424589-4CEC-4E02-9B33-D2B5909A54E0}"/>
+                <a16:creationId xmlns:a16="http://schemas.microsoft.com/office/drawing/2014/main" id="{BF2E4D35-D00A-4E0D-A9BA-CDB7F60FA68A}"/>
               </a:ext>
             </a:extLst>
           </p:cNvPr>
@@ -6202,7 +6202,7 @@
           <p:cNvPr id="14" name="">
             <a:extLst xmlns:a="http://schemas.openxmlformats.org/drawingml/2006/main">
               <a:ext uri="{FF2B5EF4-FFF2-40B4-BE49-F238E27FC236}">
-                <a16:creationId xmlns:a16="http://schemas.microsoft.com/office/drawing/2014/main" id="{685191CF-1E6E-42BE-8F42-D27F72DDF243}"/>
+                <a16:creationId xmlns:a16="http://schemas.microsoft.com/office/drawing/2014/main" id="{4DA54F89-9D2F-4BEE-A060-3E7745FA3E3C}"/>
               </a:ext>
             </a:extLst>
           </p:cNvPr>
@@ -6236,7 +6236,7 @@
           <p:cNvPr id="15" name="">
             <a:extLst xmlns:a="http://schemas.openxmlformats.org/drawingml/2006/main">
               <a:ext uri="{FF2B5EF4-FFF2-40B4-BE49-F238E27FC236}">
-                <a16:creationId xmlns:a16="http://schemas.microsoft.com/office/drawing/2014/main" id="{4F2694E2-FB6F-48BD-AF3F-FF23136F016F}"/>
+                <a16:creationId xmlns:a16="http://schemas.microsoft.com/office/drawing/2014/main" id="{4CE2A4BC-5757-45FD-B3B4-AF5822C052E9}"/>
               </a:ext>
             </a:extLst>
           </p:cNvPr>
@@ -6268,7 +6268,7 @@
           <p:cNvPr id="16" name="">
             <a:extLst xmlns:a="http://schemas.openxmlformats.org/drawingml/2006/main">
               <a:ext uri="{FF2B5EF4-FFF2-40B4-BE49-F238E27FC236}">
-                <a16:creationId xmlns:a16="http://schemas.microsoft.com/office/drawing/2014/main" id="{45057931-3383-4A31-90BA-4551DD06B6BB}"/>
+                <a16:creationId xmlns:a16="http://schemas.microsoft.com/office/drawing/2014/main" id="{4241D3A6-1EB5-4BEE-83D8-2A2FEE9E8181}"/>
               </a:ext>
             </a:extLst>
           </p:cNvPr>
@@ -6325,7 +6325,7 @@
           <p:cNvPr id="17" name="">
             <a:extLst xmlns:a="http://schemas.openxmlformats.org/drawingml/2006/main">
               <a:ext uri="{FF2B5EF4-FFF2-40B4-BE49-F238E27FC236}">
-                <a16:creationId xmlns:a16="http://schemas.microsoft.com/office/drawing/2014/main" id="{BE0798A6-365E-4BAD-ACFB-82E0FA36C4C5}"/>
+                <a16:creationId xmlns:a16="http://schemas.microsoft.com/office/drawing/2014/main" id="{7A13914D-31C0-4FE0-B0AC-7FBD27754CC6}"/>
               </a:ext>
             </a:extLst>
           </p:cNvPr>
@@ -6382,7 +6382,7 @@
           <p:cNvPr id="18" name="">
             <a:extLst xmlns:a="http://schemas.openxmlformats.org/drawingml/2006/main">
               <a:ext uri="{FF2B5EF4-FFF2-40B4-BE49-F238E27FC236}">
-                <a16:creationId xmlns:a16="http://schemas.microsoft.com/office/drawing/2014/main" id="{B9442C5E-8154-4076-9323-F2519F688E36}"/>
+                <a16:creationId xmlns:a16="http://schemas.microsoft.com/office/drawing/2014/main" id="{BE466045-F42F-4CD7-A5C7-E5A266398AA3}"/>
               </a:ext>
             </a:extLst>
           </p:cNvPr>
@@ -6416,7 +6416,7 @@
           <p:cNvPr id="19" name="">
             <a:extLst xmlns:a="http://schemas.openxmlformats.org/drawingml/2006/main">
               <a:ext uri="{FF2B5EF4-FFF2-40B4-BE49-F238E27FC236}">
-                <a16:creationId xmlns:a16="http://schemas.microsoft.com/office/drawing/2014/main" id="{73D3B20F-C290-42DC-A5C4-DC8A01419E4F}"/>
+                <a16:creationId xmlns:a16="http://schemas.microsoft.com/office/drawing/2014/main" id="{FAF4002E-142C-4AE4-9F69-FA2794E2A494}"/>
               </a:ext>
             </a:extLst>
           </p:cNvPr>
@@ -6448,7 +6448,7 @@
           <p:cNvPr id="20" name="">
             <a:extLst xmlns:a="http://schemas.openxmlformats.org/drawingml/2006/main">
               <a:ext uri="{FF2B5EF4-FFF2-40B4-BE49-F238E27FC236}">
-                <a16:creationId xmlns:a16="http://schemas.microsoft.com/office/drawing/2014/main" id="{530A7DA9-35EE-4E66-956C-79A36F1F28E6}"/>
+                <a16:creationId xmlns:a16="http://schemas.microsoft.com/office/drawing/2014/main" id="{C461847A-92EC-4156-9FD4-13A7A0391541}"/>
               </a:ext>
             </a:extLst>
           </p:cNvPr>
@@ -6505,7 +6505,7 @@
           <p:cNvPr id="21" name="">
             <a:extLst xmlns:a="http://schemas.openxmlformats.org/drawingml/2006/main">
               <a:ext uri="{FF2B5EF4-FFF2-40B4-BE49-F238E27FC236}">
-                <a16:creationId xmlns:a16="http://schemas.microsoft.com/office/drawing/2014/main" id="{4472DEBA-A088-421E-996A-C69A97E823E9}"/>
+                <a16:creationId xmlns:a16="http://schemas.microsoft.com/office/drawing/2014/main" id="{6C1A0FA4-ACDF-44A0-ADCA-0CE427F05ED0}"/>
               </a:ext>
             </a:extLst>
           </p:cNvPr>
@@ -6562,7 +6562,7 @@
           <p:cNvPr id="22" name="">
             <a:extLst xmlns:a="http://schemas.openxmlformats.org/drawingml/2006/main">
               <a:ext uri="{FF2B5EF4-FFF2-40B4-BE49-F238E27FC236}">
-                <a16:creationId xmlns:a16="http://schemas.microsoft.com/office/drawing/2014/main" id="{D8411299-E518-4600-BBB7-4D6A6B7E56EC}"/>
+                <a16:creationId xmlns:a16="http://schemas.microsoft.com/office/drawing/2014/main" id="{BD81F4E3-0EE6-4F75-A25B-FAAE5E407FF2}"/>
               </a:ext>
             </a:extLst>
           </p:cNvPr>
@@ -6617,7 +6617,7 @@
     </p:spTree>
     <p:extLst>
       <p:ext uri="{BB962C8B-B14F-4D97-AF65-F5344CB8AC3E}">
-        <p14:creationId xmlns:p14="http://schemas.microsoft.com/office/powerpoint/2010/main" val="290961801"/>
+        <p14:creationId xmlns:p14="http://schemas.microsoft.com/office/powerpoint/2010/main" val="309713677"/>
       </p:ext>
     </p:extLst>
   </p:cSld>
@@ -6818,7 +6818,7 @@
           <p:cNvPr id="16" name="">
             <a:extLst xmlns:a="http://schemas.openxmlformats.org/drawingml/2006/main">
               <a:ext uri="{FF2B5EF4-FFF2-40B4-BE49-F238E27FC236}">
-                <a16:creationId xmlns:a16="http://schemas.microsoft.com/office/drawing/2014/main" id="{9DC1C2BC-85F0-4EA0-8098-C3661E8365F7}"/>
+                <a16:creationId xmlns:a16="http://schemas.microsoft.com/office/drawing/2014/main" id="{F2E001D1-E461-4AD9-98FA-7DBAD22795FC}"/>
               </a:ext>
             </a:extLst>
           </p:cNvPr>
@@ -6850,7 +6850,7 @@
           <p:cNvPr id="2" name="">
             <a:extLst xmlns:a="http://schemas.openxmlformats.org/drawingml/2006/main">
               <a:ext uri="{FF2B5EF4-FFF2-40B4-BE49-F238E27FC236}">
-                <a16:creationId xmlns:a16="http://schemas.microsoft.com/office/drawing/2014/main" id="{F99F5C73-B9F1-4338-A100-6F61CEFE2FD8}"/>
+                <a16:creationId xmlns:a16="http://schemas.microsoft.com/office/drawing/2014/main" id="{5C0F33F0-0480-4B5E-B9F4-9BF875DC2DCB}"/>
               </a:ext>
             </a:extLst>
           </p:cNvPr>
@@ -6907,7 +6907,7 @@
           <p:cNvPr id="3" name="">
             <a:extLst xmlns:a="http://schemas.openxmlformats.org/drawingml/2006/main">
               <a:ext uri="{FF2B5EF4-FFF2-40B4-BE49-F238E27FC236}">
-                <a16:creationId xmlns:a16="http://schemas.microsoft.com/office/drawing/2014/main" id="{214DD18A-0E97-4CFC-82F4-7AD01ED1A852}"/>
+                <a16:creationId xmlns:a16="http://schemas.microsoft.com/office/drawing/2014/main" id="{8BC7FC45-B544-45B6-8AC5-55279070E6AC}"/>
               </a:ext>
             </a:extLst>
           </p:cNvPr>
@@ -6939,7 +6939,7 @@
           <p:cNvPr id="4" name="">
             <a:extLst xmlns:a="http://schemas.openxmlformats.org/drawingml/2006/main">
               <a:ext uri="{FF2B5EF4-FFF2-40B4-BE49-F238E27FC236}">
-                <a16:creationId xmlns:a16="http://schemas.microsoft.com/office/drawing/2014/main" id="{AF48AEF7-937F-459B-A2FF-ABC6F202C35A}"/>
+                <a16:creationId xmlns:a16="http://schemas.microsoft.com/office/drawing/2014/main" id="{A8264AE8-FD91-4D91-82A4-D0D609796DE6}"/>
               </a:ext>
             </a:extLst>
           </p:cNvPr>
@@ -6996,7 +6996,7 @@
           <p:cNvPr id="5" name="">
             <a:extLst xmlns:a="http://schemas.openxmlformats.org/drawingml/2006/main">
               <a:ext uri="{FF2B5EF4-FFF2-40B4-BE49-F238E27FC236}">
-                <a16:creationId xmlns:a16="http://schemas.microsoft.com/office/drawing/2014/main" id="{7EFC085F-9D22-4357-8EEE-B9246B60965A}"/>
+                <a16:creationId xmlns:a16="http://schemas.microsoft.com/office/drawing/2014/main" id="{6416B1B4-2A13-4C1F-A2E6-1D2DAD31E080}"/>
               </a:ext>
             </a:extLst>
           </p:cNvPr>
@@ -7053,7 +7053,7 @@
           <p:cNvPr id="6" name="">
             <a:extLst xmlns:a="http://schemas.openxmlformats.org/drawingml/2006/main">
               <a:ext uri="{FF2B5EF4-FFF2-40B4-BE49-F238E27FC236}">
-                <a16:creationId xmlns:a16="http://schemas.microsoft.com/office/drawing/2014/main" id="{A76E865C-0839-4996-9B28-EBD95E8117C9}"/>
+                <a16:creationId xmlns:a16="http://schemas.microsoft.com/office/drawing/2014/main" id="{D68FCBEC-F6FA-41D2-B1E4-903E6E9A76D2}"/>
               </a:ext>
             </a:extLst>
           </p:cNvPr>
@@ -7110,7 +7110,7 @@
           <p:cNvPr id="7" name="">
             <a:extLst xmlns:a="http://schemas.openxmlformats.org/drawingml/2006/main">
               <a:ext uri="{FF2B5EF4-FFF2-40B4-BE49-F238E27FC236}">
-                <a16:creationId xmlns:a16="http://schemas.microsoft.com/office/drawing/2014/main" id="{B00AD27A-2434-47AC-81DB-AA1708F60E41}"/>
+                <a16:creationId xmlns:a16="http://schemas.microsoft.com/office/drawing/2014/main" id="{C8408596-AC6E-460F-9BD7-111F64C2685D}"/>
               </a:ext>
             </a:extLst>
           </p:cNvPr>
@@ -7142,7 +7142,7 @@
           <p:cNvPr id="8" name="">
             <a:extLst xmlns:a="http://schemas.openxmlformats.org/drawingml/2006/main">
               <a:ext uri="{FF2B5EF4-FFF2-40B4-BE49-F238E27FC236}">
-                <a16:creationId xmlns:a16="http://schemas.microsoft.com/office/drawing/2014/main" id="{F76CCCA3-0314-44C4-9F7B-D883EEE5BF01}"/>
+                <a16:creationId xmlns:a16="http://schemas.microsoft.com/office/drawing/2014/main" id="{97D8F3A6-F3CF-4D61-B3E8-2788F4E11BDA}"/>
               </a:ext>
             </a:extLst>
           </p:cNvPr>
@@ -7199,7 +7199,7 @@
           <p:cNvPr id="9" name="">
             <a:extLst xmlns:a="http://schemas.openxmlformats.org/drawingml/2006/main">
               <a:ext uri="{FF2B5EF4-FFF2-40B4-BE49-F238E27FC236}">
-                <a16:creationId xmlns:a16="http://schemas.microsoft.com/office/drawing/2014/main" id="{2C145034-26B5-4FD4-89CD-B0CE01670553}"/>
+                <a16:creationId xmlns:a16="http://schemas.microsoft.com/office/drawing/2014/main" id="{8EDA0A95-8A0C-4A75-959A-12AD76FA5B47}"/>
               </a:ext>
             </a:extLst>
           </p:cNvPr>
@@ -7256,7 +7256,7 @@
           <p:cNvPr id="10" name="">
             <a:extLst xmlns:a="http://schemas.openxmlformats.org/drawingml/2006/main">
               <a:ext uri="{FF2B5EF4-FFF2-40B4-BE49-F238E27FC236}">
-                <a16:creationId xmlns:a16="http://schemas.microsoft.com/office/drawing/2014/main" id="{AD46430F-FE0D-4022-B527-89C4D4E58692}"/>
+                <a16:creationId xmlns:a16="http://schemas.microsoft.com/office/drawing/2014/main" id="{E86BD9EB-A171-4BF6-BF5B-52E388428EB5}"/>
               </a:ext>
             </a:extLst>
           </p:cNvPr>
@@ -7313,7 +7313,7 @@
           <p:cNvPr id="11" name="">
             <a:extLst xmlns:a="http://schemas.openxmlformats.org/drawingml/2006/main">
               <a:ext uri="{FF2B5EF4-FFF2-40B4-BE49-F238E27FC236}">
-                <a16:creationId xmlns:a16="http://schemas.microsoft.com/office/drawing/2014/main" id="{087F81A7-C628-46C0-9145-A8E3509AA679}"/>
+                <a16:creationId xmlns:a16="http://schemas.microsoft.com/office/drawing/2014/main" id="{7CFB3828-D694-48E1-9E8A-48E61DDE4421}"/>
               </a:ext>
             </a:extLst>
           </p:cNvPr>
@@ -7345,7 +7345,7 @@
           <p:cNvPr id="12" name="">
             <a:extLst xmlns:a="http://schemas.openxmlformats.org/drawingml/2006/main">
               <a:ext uri="{FF2B5EF4-FFF2-40B4-BE49-F238E27FC236}">
-                <a16:creationId xmlns:a16="http://schemas.microsoft.com/office/drawing/2014/main" id="{511F75E4-7A21-492B-92D3-3A2CD259CC6F}"/>
+                <a16:creationId xmlns:a16="http://schemas.microsoft.com/office/drawing/2014/main" id="{82886E28-664C-4973-8FBD-27B221B8EC1E}"/>
               </a:ext>
             </a:extLst>
           </p:cNvPr>
@@ -7402,7 +7402,7 @@
           <p:cNvPr id="13" name="">
             <a:extLst xmlns:a="http://schemas.openxmlformats.org/drawingml/2006/main">
               <a:ext uri="{FF2B5EF4-FFF2-40B4-BE49-F238E27FC236}">
-                <a16:creationId xmlns:a16="http://schemas.microsoft.com/office/drawing/2014/main" id="{634738F1-D8B9-4B25-B3DD-DB041A2EB3B3}"/>
+                <a16:creationId xmlns:a16="http://schemas.microsoft.com/office/drawing/2014/main" id="{8070EA95-223D-4D97-AF0E-C495C097923E}"/>
               </a:ext>
             </a:extLst>
           </p:cNvPr>
@@ -7459,7 +7459,7 @@
           <p:cNvPr id="14" name="">
             <a:extLst xmlns:a="http://schemas.openxmlformats.org/drawingml/2006/main">
               <a:ext uri="{FF2B5EF4-FFF2-40B4-BE49-F238E27FC236}">
-                <a16:creationId xmlns:a16="http://schemas.microsoft.com/office/drawing/2014/main" id="{B273B0E3-2570-4B7B-830E-8D87709D7F77}"/>
+                <a16:creationId xmlns:a16="http://schemas.microsoft.com/office/drawing/2014/main" id="{73A12260-B6B7-406C-9125-802E50DE96D8}"/>
               </a:ext>
             </a:extLst>
           </p:cNvPr>
@@ -7516,7 +7516,7 @@
           <p:cNvPr id="15" name="">
             <a:extLst xmlns:a="http://schemas.openxmlformats.org/drawingml/2006/main">
               <a:ext uri="{FF2B5EF4-FFF2-40B4-BE49-F238E27FC236}">
-                <a16:creationId xmlns:a16="http://schemas.microsoft.com/office/drawing/2014/main" id="{10BED3D0-50EB-427E-96E7-207ABFFFE6AA}"/>
+                <a16:creationId xmlns:a16="http://schemas.microsoft.com/office/drawing/2014/main" id="{DDFB3AF5-9BEC-48FE-8AFF-81A73179FD88}"/>
               </a:ext>
             </a:extLst>
           </p:cNvPr>
@@ -7571,7 +7571,7 @@
     </p:spTree>
     <p:extLst>
       <p:ext uri="{BB962C8B-B14F-4D97-AF65-F5344CB8AC3E}">
-        <p14:creationId xmlns:p14="http://schemas.microsoft.com/office/powerpoint/2010/main" val="220683426"/>
+        <p14:creationId xmlns:p14="http://schemas.microsoft.com/office/powerpoint/2010/main" val="1440263529"/>
       </p:ext>
     </p:extLst>
   </p:cSld>
@@ -7772,7 +7772,7 @@
           <p:cNvPr id="23" name="">
             <a:extLst xmlns:a="http://schemas.openxmlformats.org/drawingml/2006/main">
               <a:ext uri="{FF2B5EF4-FFF2-40B4-BE49-F238E27FC236}">
-                <a16:creationId xmlns:a16="http://schemas.microsoft.com/office/drawing/2014/main" id="{A69D1BE6-259A-44CD-87F4-619E2E0059A2}"/>
+                <a16:creationId xmlns:a16="http://schemas.microsoft.com/office/drawing/2014/main" id="{C3C9A38C-1CF8-476B-8754-9675B1DC7A53}"/>
               </a:ext>
             </a:extLst>
           </p:cNvPr>
@@ -7804,7 +7804,7 @@
           <p:cNvPr id="2" name="">
             <a:extLst xmlns:a="http://schemas.openxmlformats.org/drawingml/2006/main">
               <a:ext uri="{FF2B5EF4-FFF2-40B4-BE49-F238E27FC236}">
-                <a16:creationId xmlns:a16="http://schemas.microsoft.com/office/drawing/2014/main" id="{3EFAE958-5BBC-4B1C-A545-9CC228F752BB}"/>
+                <a16:creationId xmlns:a16="http://schemas.microsoft.com/office/drawing/2014/main" id="{5CC569DA-D0F0-49D5-9070-2B79A7E54C79}"/>
               </a:ext>
             </a:extLst>
           </p:cNvPr>
@@ -7861,7 +7861,7 @@
           <p:cNvPr id="3" name="">
             <a:extLst xmlns:a="http://schemas.openxmlformats.org/drawingml/2006/main">
               <a:ext uri="{FF2B5EF4-FFF2-40B4-BE49-F238E27FC236}">
-                <a16:creationId xmlns:a16="http://schemas.microsoft.com/office/drawing/2014/main" id="{002BEF74-57E0-45F5-B16F-15716708320C}"/>
+                <a16:creationId xmlns:a16="http://schemas.microsoft.com/office/drawing/2014/main" id="{E9B92502-CCBA-4E3C-8049-D56792469E3E}"/>
               </a:ext>
             </a:extLst>
           </p:cNvPr>
@@ -7893,7 +7893,7 @@
           <p:cNvPr id="4" name="">
             <a:extLst xmlns:a="http://schemas.openxmlformats.org/drawingml/2006/main">
               <a:ext uri="{FF2B5EF4-FFF2-40B4-BE49-F238E27FC236}">
-                <a16:creationId xmlns:a16="http://schemas.microsoft.com/office/drawing/2014/main" id="{2C7C487E-B4AF-4B61-B892-7122246AC3B8}"/>
+                <a16:creationId xmlns:a16="http://schemas.microsoft.com/office/drawing/2014/main" id="{D059031F-1EF4-41CC-8CCC-16668F3BA44E}"/>
               </a:ext>
             </a:extLst>
           </p:cNvPr>
@@ -7950,7 +7950,7 @@
           <p:cNvPr id="5" name="">
             <a:extLst xmlns:a="http://schemas.openxmlformats.org/drawingml/2006/main">
               <a:ext uri="{FF2B5EF4-FFF2-40B4-BE49-F238E27FC236}">
-                <a16:creationId xmlns:a16="http://schemas.microsoft.com/office/drawing/2014/main" id="{AA7217CC-457C-415B-82DD-28464B6D754E}"/>
+                <a16:creationId xmlns:a16="http://schemas.microsoft.com/office/drawing/2014/main" id="{6B0077C1-3817-44AB-A5A0-027126708D4B}"/>
               </a:ext>
             </a:extLst>
           </p:cNvPr>
@@ -8007,7 +8007,7 @@
           <p:cNvPr id="6" name="">
             <a:extLst xmlns:a="http://schemas.openxmlformats.org/drawingml/2006/main">
               <a:ext uri="{FF2B5EF4-FFF2-40B4-BE49-F238E27FC236}">
-                <a16:creationId xmlns:a16="http://schemas.microsoft.com/office/drawing/2014/main" id="{42BDA3E8-EAA3-4A95-9CBD-F73002A278F8}"/>
+                <a16:creationId xmlns:a16="http://schemas.microsoft.com/office/drawing/2014/main" id="{B969D816-6E4D-45D2-9F60-72A5D2126AA5}"/>
               </a:ext>
             </a:extLst>
           </p:cNvPr>
@@ -8064,7 +8064,7 @@
           <p:cNvPr id="7" name="">
             <a:extLst xmlns:a="http://schemas.openxmlformats.org/drawingml/2006/main">
               <a:ext uri="{FF2B5EF4-FFF2-40B4-BE49-F238E27FC236}">
-                <a16:creationId xmlns:a16="http://schemas.microsoft.com/office/drawing/2014/main" id="{9A3003BD-0030-4144-9511-C25FD0890033}"/>
+                <a16:creationId xmlns:a16="http://schemas.microsoft.com/office/drawing/2014/main" id="{749F9B87-D442-4F59-86CD-68B0CBA27D8C}"/>
               </a:ext>
             </a:extLst>
           </p:cNvPr>
@@ -8096,7 +8096,7 @@
           <p:cNvPr id="8" name="">
             <a:extLst xmlns:a="http://schemas.openxmlformats.org/drawingml/2006/main">
               <a:ext uri="{FF2B5EF4-FFF2-40B4-BE49-F238E27FC236}">
-                <a16:creationId xmlns:a16="http://schemas.microsoft.com/office/drawing/2014/main" id="{F685E3A8-1D13-4036-A999-46D652FB80EF}"/>
+                <a16:creationId xmlns:a16="http://schemas.microsoft.com/office/drawing/2014/main" id="{AE997492-24F4-4391-9D6B-2E3C54C39616}"/>
               </a:ext>
             </a:extLst>
           </p:cNvPr>
@@ -8153,7 +8153,7 @@
           <p:cNvPr id="9" name="">
             <a:extLst xmlns:a="http://schemas.openxmlformats.org/drawingml/2006/main">
               <a:ext uri="{FF2B5EF4-FFF2-40B4-BE49-F238E27FC236}">
-                <a16:creationId xmlns:a16="http://schemas.microsoft.com/office/drawing/2014/main" id="{C9585291-5A6E-4872-B047-3B9398641EA7}"/>
+                <a16:creationId xmlns:a16="http://schemas.microsoft.com/office/drawing/2014/main" id="{0CAE6235-1D65-44B2-BBBD-F5520CBC7D13}"/>
               </a:ext>
             </a:extLst>
           </p:cNvPr>
@@ -8210,19 +8210,19 @@
           <p:cNvPr id="10" name="">
             <a:extLst xmlns:a="http://schemas.openxmlformats.org/drawingml/2006/main">
               <a:ext uri="{FF2B5EF4-FFF2-40B4-BE49-F238E27FC236}">
-                <a16:creationId xmlns:a16="http://schemas.microsoft.com/office/drawing/2014/main" id="{DF5D4CF7-5A87-403E-BB7C-C8553F1F23DF}"/>
-              </a:ext>
-            </a:extLst>
-          </p:cNvPr>
-          <p:cNvSpPr>
-            <a:spLocks xmlns:a="http://schemas.openxmlformats.org/drawingml/2006/main" noGrp="1"/>
-          </p:cNvSpPr>
-          <p:nvPr/>
-        </p:nvSpPr>
-        <p:spPr>
-          <a:xfrm xmlns:a="http://schemas.openxmlformats.org/drawingml/2006/main">
-            <a:off x="914400" y="1257300"/>
-            <a:ext cx="10363200" cy="781050"/>
+                <a16:creationId xmlns:a16="http://schemas.microsoft.com/office/drawing/2014/main" id="{F20DE343-244D-493D-B8B5-7911DB20BB53}"/>
+              </a:ext>
+            </a:extLst>
+          </p:cNvPr>
+          <p:cNvSpPr>
+            <a:spLocks xmlns:a="http://schemas.openxmlformats.org/drawingml/2006/main" noGrp="1"/>
+          </p:cNvSpPr>
+          <p:nvPr/>
+        </p:nvSpPr>
+        <p:spPr>
+          <a:xfrm xmlns:a="http://schemas.openxmlformats.org/drawingml/2006/main">
+            <a:off x="857250" y="1219200"/>
+            <a:ext cx="10477500" cy="742950"/>
           </a:xfrm>
           <a:prstGeom xmlns:a="http://schemas.openxmlformats.org/drawingml/2006/main" prst="rect">
             <a:avLst/>
@@ -8239,7 +8239,7 @@
           <a:lstStyle xmlns:a="http://schemas.openxmlformats.org/drawingml/2006/main"/>
           <a:p xmlns:a="http://schemas.openxmlformats.org/drawingml/2006/main">
             <a:pPr algn="ctr">
-              <a:defRPr sz="2175" b="1">
+              <a:defRPr sz="2100" b="1">
                 <a:solidFill>
                   <a:srgbClr val="17253A"/>
                 </a:solidFill>
@@ -8249,7 +8249,7 @@
               </a:defRPr>
             </a:pPr>
             <a:r>
-              <a:rPr sz="2175" b="1">
+              <a:rPr sz="2100" b="1">
                 <a:solidFill>
                   <a:srgbClr val="17253A"/>
                 </a:solidFill>
@@ -8267,28 +8267,30 @@
           <p:cNvPr id="11" name="">
             <a:extLst xmlns:a="http://schemas.openxmlformats.org/drawingml/2006/main">
               <a:ext uri="{FF2B5EF4-FFF2-40B4-BE49-F238E27FC236}">
-                <a16:creationId xmlns:a16="http://schemas.microsoft.com/office/drawing/2014/main" id="{DCE5A4CE-F76D-415C-A0D3-C4B6B8E25F1E}"/>
-              </a:ext>
-            </a:extLst>
-          </p:cNvPr>
-          <p:cNvSpPr>
-            <a:spLocks xmlns:a="http://schemas.openxmlformats.org/drawingml/2006/main" noGrp="1"/>
-          </p:cNvSpPr>
-          <p:nvPr/>
-        </p:nvSpPr>
-        <p:spPr>
-          <a:xfrm xmlns:a="http://schemas.openxmlformats.org/drawingml/2006/main">
-            <a:off x="1000125" y="2247900"/>
-            <a:ext cx="476250" cy="476250"/>
-          </a:xfrm>
-          <a:prstGeom xmlns:a="http://schemas.openxmlformats.org/drawingml/2006/main" prst="ellipse">
+                <a16:creationId xmlns:a16="http://schemas.microsoft.com/office/drawing/2014/main" id="{32BB62B3-BB33-466B-999D-768D70B11B12}"/>
+              </a:ext>
+            </a:extLst>
+          </p:cNvPr>
+          <p:cNvSpPr>
+            <a:spLocks xmlns:a="http://schemas.openxmlformats.org/drawingml/2006/main" noGrp="1"/>
+          </p:cNvSpPr>
+          <p:nvPr/>
+        </p:nvSpPr>
+        <p:spPr>
+          <a:xfrm xmlns:a="http://schemas.openxmlformats.org/drawingml/2006/main">
+            <a:off x="971550" y="2124075"/>
+            <a:ext cx="38100" cy="3524250"/>
+          </a:xfrm>
+          <a:prstGeom xmlns:a="http://schemas.openxmlformats.org/drawingml/2006/main" prst="rect">
             <a:avLst/>
           </a:prstGeom>
           <a:solidFill xmlns:a="http://schemas.openxmlformats.org/drawingml/2006/main">
-            <a:srgbClr val="18324A"/>
+            <a:srgbClr val="2C6E73"/>
           </a:solidFill>
           <a:ln xmlns:a="http://schemas.openxmlformats.org/drawingml/2006/main" w="0">
-            <a:noFill/>
+            <a:solidFill>
+              <a:srgbClr val="2C6E73"/>
+            </a:solidFill>
           </a:ln>
         </p:spPr>
       </p:sp>
@@ -8297,19 +8299,19 @@
           <p:cNvPr id="12" name="">
             <a:extLst xmlns:a="http://schemas.openxmlformats.org/drawingml/2006/main">
               <a:ext uri="{FF2B5EF4-FFF2-40B4-BE49-F238E27FC236}">
-                <a16:creationId xmlns:a16="http://schemas.microsoft.com/office/drawing/2014/main" id="{B8BB004A-7629-4225-88C2-FC94B7FD873E}"/>
-              </a:ext>
-            </a:extLst>
-          </p:cNvPr>
-          <p:cNvSpPr>
-            <a:spLocks xmlns:a="http://schemas.openxmlformats.org/drawingml/2006/main" noGrp="1"/>
-          </p:cNvSpPr>
-          <p:nvPr/>
-        </p:nvSpPr>
-        <p:spPr>
-          <a:xfrm xmlns:a="http://schemas.openxmlformats.org/drawingml/2006/main">
-            <a:off x="1000125" y="2276475"/>
-            <a:ext cx="476250" cy="419100"/>
+                <a16:creationId xmlns:a16="http://schemas.microsoft.com/office/drawing/2014/main" id="{FA63F69C-61AB-40DA-85EC-0488393CA2FB}"/>
+              </a:ext>
+            </a:extLst>
+          </p:cNvPr>
+          <p:cNvSpPr>
+            <a:spLocks xmlns:a="http://schemas.openxmlformats.org/drawingml/2006/main" noGrp="1"/>
+          </p:cNvSpPr>
+          <p:nvPr/>
+        </p:nvSpPr>
+        <p:spPr>
+          <a:xfrm xmlns:a="http://schemas.openxmlformats.org/drawingml/2006/main">
+            <a:off x="1162050" y="2200275"/>
+            <a:ext cx="400050" cy="400050"/>
           </a:xfrm>
           <a:prstGeom xmlns:a="http://schemas.openxmlformats.org/drawingml/2006/main" prst="rect">
             <a:avLst/>
@@ -8326,9 +8328,9 @@
           <a:lstStyle xmlns:a="http://schemas.openxmlformats.org/drawingml/2006/main"/>
           <a:p xmlns:a="http://schemas.openxmlformats.org/drawingml/2006/main">
             <a:pPr algn="ctr">
-              <a:defRPr sz="1350" b="1">
-                <a:solidFill>
-                  <a:srgbClr val="FFFFFF"/>
+              <a:defRPr sz="1125" b="1">
+                <a:solidFill>
+                  <a:srgbClr val="2C6E73"/>
                 </a:solidFill>
                 <a:latin typeface="Arial"/>
                 <a:ea typeface="Arial"/>
@@ -8336,9 +8338,9 @@
               </a:defRPr>
             </a:pPr>
             <a:r>
-              <a:rPr sz="1350" b="1">
-                <a:solidFill>
-                  <a:srgbClr val="FFFFFF"/>
+              <a:rPr sz="1125" b="1">
+                <a:solidFill>
+                  <a:srgbClr val="2C6E73"/>
                 </a:solidFill>
                 <a:latin typeface="Arial"/>
                 <a:ea typeface="Arial"/>
@@ -8354,19 +8356,19 @@
           <p:cNvPr id="13" name="">
             <a:extLst xmlns:a="http://schemas.openxmlformats.org/drawingml/2006/main">
               <a:ext uri="{FF2B5EF4-FFF2-40B4-BE49-F238E27FC236}">
-                <a16:creationId xmlns:a16="http://schemas.microsoft.com/office/drawing/2014/main" id="{8210E7B1-51EA-4A3B-90DE-4BBA69A20F96}"/>
-              </a:ext>
-            </a:extLst>
-          </p:cNvPr>
-          <p:cNvSpPr>
-            <a:spLocks xmlns:a="http://schemas.openxmlformats.org/drawingml/2006/main" noGrp="1"/>
-          </p:cNvSpPr>
-          <p:nvPr/>
-        </p:nvSpPr>
-        <p:spPr>
-          <a:xfrm xmlns:a="http://schemas.openxmlformats.org/drawingml/2006/main">
-            <a:off x="1714500" y="2181225"/>
-            <a:ext cx="9429750" cy="609600"/>
+                <a16:creationId xmlns:a16="http://schemas.microsoft.com/office/drawing/2014/main" id="{2B8EF8A0-B711-4F5B-BE09-00EA016F24E2}"/>
+              </a:ext>
+            </a:extLst>
+          </p:cNvPr>
+          <p:cNvSpPr>
+            <a:spLocks xmlns:a="http://schemas.openxmlformats.org/drawingml/2006/main" noGrp="1"/>
+          </p:cNvSpPr>
+          <p:nvPr/>
+        </p:nvSpPr>
+        <p:spPr>
+          <a:xfrm xmlns:a="http://schemas.openxmlformats.org/drawingml/2006/main">
+            <a:off x="1714500" y="2114550"/>
+            <a:ext cx="9525000" cy="809625"/>
           </a:xfrm>
           <a:prstGeom xmlns:a="http://schemas.openxmlformats.org/drawingml/2006/main" prst="rect">
             <a:avLst/>
@@ -8383,7 +8385,7 @@
           <a:lstStyle xmlns:a="http://schemas.openxmlformats.org/drawingml/2006/main"/>
           <a:p xmlns:a="http://schemas.openxmlformats.org/drawingml/2006/main">
             <a:pPr algn="l">
-              <a:defRPr sz="1500" b="0">
+              <a:defRPr sz="1725" b="0">
                 <a:solidFill>
                   <a:srgbClr val="17253A"/>
                 </a:solidFill>
@@ -8393,7 +8395,7 @@
               </a:defRPr>
             </a:pPr>
             <a:r>
-              <a:rPr sz="1500" b="0">
+              <a:rPr sz="1725" b="0">
                 <a:solidFill>
                   <a:srgbClr val="17253A"/>
                 </a:solidFill>
@@ -8401,7 +8403,7 @@
                 <a:ea typeface="Arial"/>
                 <a:cs typeface="Arial"/>
               </a:rPr>
-              <a:t>Identify the structure: Read the whole problem and mark the question and useful information.</a:t>
+              <a:t>Tickets sold: 48,675 + 39,890</a:t>
             </a:r>
           </a:p>
         </p:txBody>
@@ -8411,28 +8413,30 @@
           <p:cNvPr id="14" name="">
             <a:extLst xmlns:a="http://schemas.openxmlformats.org/drawingml/2006/main">
               <a:ext uri="{FF2B5EF4-FFF2-40B4-BE49-F238E27FC236}">
-                <a16:creationId xmlns:a16="http://schemas.microsoft.com/office/drawing/2014/main" id="{038FAB85-072A-4493-BE6B-C3DB074CDFDB}"/>
-              </a:ext>
-            </a:extLst>
-          </p:cNvPr>
-          <p:cNvSpPr>
-            <a:spLocks xmlns:a="http://schemas.openxmlformats.org/drawingml/2006/main" noGrp="1"/>
-          </p:cNvSpPr>
-          <p:nvPr/>
-        </p:nvSpPr>
-        <p:spPr>
-          <a:xfrm xmlns:a="http://schemas.openxmlformats.org/drawingml/2006/main">
-            <a:off x="1000125" y="2990850"/>
-            <a:ext cx="476250" cy="476250"/>
-          </a:xfrm>
-          <a:prstGeom xmlns:a="http://schemas.openxmlformats.org/drawingml/2006/main" prst="ellipse">
+                <a16:creationId xmlns:a16="http://schemas.microsoft.com/office/drawing/2014/main" id="{18606592-9E41-4B81-B6B7-6C7A7E38086A}"/>
+              </a:ext>
+            </a:extLst>
+          </p:cNvPr>
+          <p:cNvSpPr>
+            <a:spLocks xmlns:a="http://schemas.openxmlformats.org/drawingml/2006/main" noGrp="1"/>
+          </p:cNvSpPr>
+          <p:nvPr/>
+        </p:nvSpPr>
+        <p:spPr>
+          <a:xfrm xmlns:a="http://schemas.openxmlformats.org/drawingml/2006/main">
+            <a:off x="1714500" y="2943225"/>
+            <a:ext cx="9334500" cy="9525"/>
+          </a:xfrm>
+          <a:prstGeom xmlns:a="http://schemas.openxmlformats.org/drawingml/2006/main" prst="rect">
             <a:avLst/>
           </a:prstGeom>
           <a:solidFill xmlns:a="http://schemas.openxmlformats.org/drawingml/2006/main">
-            <a:srgbClr val="2C6E73"/>
+            <a:srgbClr val="D9E0E6"/>
           </a:solidFill>
           <a:ln xmlns:a="http://schemas.openxmlformats.org/drawingml/2006/main" w="0">
-            <a:noFill/>
+            <a:solidFill>
+              <a:srgbClr val="D9E0E6"/>
+            </a:solidFill>
           </a:ln>
         </p:spPr>
       </p:sp>
@@ -8441,19 +8445,19 @@
           <p:cNvPr id="15" name="">
             <a:extLst xmlns:a="http://schemas.openxmlformats.org/drawingml/2006/main">
               <a:ext uri="{FF2B5EF4-FFF2-40B4-BE49-F238E27FC236}">
-                <a16:creationId xmlns:a16="http://schemas.microsoft.com/office/drawing/2014/main" id="{53393B64-9AE0-441B-AC14-FBEA6DE5E0AC}"/>
-              </a:ext>
-            </a:extLst>
-          </p:cNvPr>
-          <p:cNvSpPr>
-            <a:spLocks xmlns:a="http://schemas.openxmlformats.org/drawingml/2006/main" noGrp="1"/>
-          </p:cNvSpPr>
-          <p:nvPr/>
-        </p:nvSpPr>
-        <p:spPr>
-          <a:xfrm xmlns:a="http://schemas.openxmlformats.org/drawingml/2006/main">
-            <a:off x="1000125" y="3019425"/>
-            <a:ext cx="476250" cy="419100"/>
+                <a16:creationId xmlns:a16="http://schemas.microsoft.com/office/drawing/2014/main" id="{8E31B9F1-15DD-4446-937C-4EC8C0B94EB3}"/>
+              </a:ext>
+            </a:extLst>
+          </p:cNvPr>
+          <p:cNvSpPr>
+            <a:spLocks xmlns:a="http://schemas.openxmlformats.org/drawingml/2006/main" noGrp="1"/>
+          </p:cNvSpPr>
+          <p:nvPr/>
+        </p:nvSpPr>
+        <p:spPr>
+          <a:xfrm xmlns:a="http://schemas.openxmlformats.org/drawingml/2006/main">
+            <a:off x="1162050" y="3076575"/>
+            <a:ext cx="400050" cy="400050"/>
           </a:xfrm>
           <a:prstGeom xmlns:a="http://schemas.openxmlformats.org/drawingml/2006/main" prst="rect">
             <a:avLst/>
@@ -8470,9 +8474,9 @@
           <a:lstStyle xmlns:a="http://schemas.openxmlformats.org/drawingml/2006/main"/>
           <a:p xmlns:a="http://schemas.openxmlformats.org/drawingml/2006/main">
             <a:pPr algn="ctr">
-              <a:defRPr sz="1350" b="1">
-                <a:solidFill>
-                  <a:srgbClr val="FFFFFF"/>
+              <a:defRPr sz="1125" b="1">
+                <a:solidFill>
+                  <a:srgbClr val="2C6E73"/>
                 </a:solidFill>
                 <a:latin typeface="Arial"/>
                 <a:ea typeface="Arial"/>
@@ -8480,9 +8484,9 @@
               </a:defRPr>
             </a:pPr>
             <a:r>
-              <a:rPr sz="1350" b="1">
-                <a:solidFill>
-                  <a:srgbClr val="FFFFFF"/>
+              <a:rPr sz="1125" b="1">
+                <a:solidFill>
+                  <a:srgbClr val="2C6E73"/>
                 </a:solidFill>
                 <a:latin typeface="Arial"/>
                 <a:ea typeface="Arial"/>
@@ -8498,19 +8502,19 @@
           <p:cNvPr id="16" name="">
             <a:extLst xmlns:a="http://schemas.openxmlformats.org/drawingml/2006/main">
               <a:ext uri="{FF2B5EF4-FFF2-40B4-BE49-F238E27FC236}">
-                <a16:creationId xmlns:a16="http://schemas.microsoft.com/office/drawing/2014/main" id="{0D310355-7965-4F47-AC51-1E462F73DD43}"/>
-              </a:ext>
-            </a:extLst>
-          </p:cNvPr>
-          <p:cNvSpPr>
-            <a:spLocks xmlns:a="http://schemas.openxmlformats.org/drawingml/2006/main" noGrp="1"/>
-          </p:cNvSpPr>
-          <p:nvPr/>
-        </p:nvSpPr>
-        <p:spPr>
-          <a:xfrm xmlns:a="http://schemas.openxmlformats.org/drawingml/2006/main">
-            <a:off x="1714500" y="2924175"/>
-            <a:ext cx="9429750" cy="609600"/>
+                <a16:creationId xmlns:a16="http://schemas.microsoft.com/office/drawing/2014/main" id="{169242AB-423F-4FE9-B90D-8C4339B6F26B}"/>
+              </a:ext>
+            </a:extLst>
+          </p:cNvPr>
+          <p:cNvSpPr>
+            <a:spLocks xmlns:a="http://schemas.openxmlformats.org/drawingml/2006/main" noGrp="1"/>
+          </p:cNvSpPr>
+          <p:nvPr/>
+        </p:nvSpPr>
+        <p:spPr>
+          <a:xfrm xmlns:a="http://schemas.openxmlformats.org/drawingml/2006/main">
+            <a:off x="1714500" y="2990850"/>
+            <a:ext cx="9525000" cy="809625"/>
           </a:xfrm>
           <a:prstGeom xmlns:a="http://schemas.openxmlformats.org/drawingml/2006/main" prst="rect">
             <a:avLst/>
@@ -8527,7 +8531,7 @@
           <a:lstStyle xmlns:a="http://schemas.openxmlformats.org/drawingml/2006/main"/>
           <a:p xmlns:a="http://schemas.openxmlformats.org/drawingml/2006/main">
             <a:pPr algn="l">
-              <a:defRPr sz="1500" b="0">
+              <a:defRPr sz="1725" b="0">
                 <a:solidFill>
                   <a:srgbClr val="17253A"/>
                 </a:solidFill>
@@ -8537,7 +8541,7 @@
               </a:defRPr>
             </a:pPr>
             <a:r>
-              <a:rPr sz="1500" b="0">
+              <a:rPr sz="1725" b="0">
                 <a:solidFill>
                   <a:srgbClr val="17253A"/>
                 </a:solidFill>
@@ -8545,7 +8549,7 @@
                 <a:ea typeface="Arial"/>
                 <a:cs typeface="Arial"/>
               </a:rPr>
-              <a:t>Set up the method: Plan the operations in order before calculating.</a:t>
+              <a:t>48,675 + 39,890 = 88,565</a:t>
             </a:r>
           </a:p>
         </p:txBody>
@@ -8555,28 +8559,30 @@
           <p:cNvPr id="17" name="">
             <a:extLst xmlns:a="http://schemas.openxmlformats.org/drawingml/2006/main">
               <a:ext uri="{FF2B5EF4-FFF2-40B4-BE49-F238E27FC236}">
-                <a16:creationId xmlns:a16="http://schemas.microsoft.com/office/drawing/2014/main" id="{1445D88A-EF86-4EC2-A95C-6FC5C0F8EF96}"/>
-              </a:ext>
-            </a:extLst>
-          </p:cNvPr>
-          <p:cNvSpPr>
-            <a:spLocks xmlns:a="http://schemas.openxmlformats.org/drawingml/2006/main" noGrp="1"/>
-          </p:cNvSpPr>
-          <p:nvPr/>
-        </p:nvSpPr>
-        <p:spPr>
-          <a:xfrm xmlns:a="http://schemas.openxmlformats.org/drawingml/2006/main">
-            <a:off x="1000125" y="3733800"/>
-            <a:ext cx="476250" cy="476250"/>
-          </a:xfrm>
-          <a:prstGeom xmlns:a="http://schemas.openxmlformats.org/drawingml/2006/main" prst="ellipse">
+                <a16:creationId xmlns:a16="http://schemas.microsoft.com/office/drawing/2014/main" id="{147423D3-0EC4-4B1A-89ED-401511331870}"/>
+              </a:ext>
+            </a:extLst>
+          </p:cNvPr>
+          <p:cNvSpPr>
+            <a:spLocks xmlns:a="http://schemas.openxmlformats.org/drawingml/2006/main" noGrp="1"/>
+          </p:cNvSpPr>
+          <p:nvPr/>
+        </p:nvSpPr>
+        <p:spPr>
+          <a:xfrm xmlns:a="http://schemas.openxmlformats.org/drawingml/2006/main">
+            <a:off x="1714500" y="3819525"/>
+            <a:ext cx="9334500" cy="9525"/>
+          </a:xfrm>
+          <a:prstGeom xmlns:a="http://schemas.openxmlformats.org/drawingml/2006/main" prst="rect">
             <a:avLst/>
           </a:prstGeom>
           <a:solidFill xmlns:a="http://schemas.openxmlformats.org/drawingml/2006/main">
-            <a:srgbClr val="2C6E73"/>
+            <a:srgbClr val="D9E0E6"/>
           </a:solidFill>
           <a:ln xmlns:a="http://schemas.openxmlformats.org/drawingml/2006/main" w="0">
-            <a:noFill/>
+            <a:solidFill>
+              <a:srgbClr val="D9E0E6"/>
+            </a:solidFill>
           </a:ln>
         </p:spPr>
       </p:sp>
@@ -8585,19 +8591,19 @@
           <p:cNvPr id="18" name="">
             <a:extLst xmlns:a="http://schemas.openxmlformats.org/drawingml/2006/main">
               <a:ext uri="{FF2B5EF4-FFF2-40B4-BE49-F238E27FC236}">
-                <a16:creationId xmlns:a16="http://schemas.microsoft.com/office/drawing/2014/main" id="{3DD8655D-EB08-4BC0-8679-96B22A32D23A}"/>
-              </a:ext>
-            </a:extLst>
-          </p:cNvPr>
-          <p:cNvSpPr>
-            <a:spLocks xmlns:a="http://schemas.openxmlformats.org/drawingml/2006/main" noGrp="1"/>
-          </p:cNvSpPr>
-          <p:nvPr/>
-        </p:nvSpPr>
-        <p:spPr>
-          <a:xfrm xmlns:a="http://schemas.openxmlformats.org/drawingml/2006/main">
-            <a:off x="1000125" y="3762375"/>
-            <a:ext cx="476250" cy="419100"/>
+                <a16:creationId xmlns:a16="http://schemas.microsoft.com/office/drawing/2014/main" id="{E75A2EFB-D29D-4D69-B63F-BF96E47C3F0E}"/>
+              </a:ext>
+            </a:extLst>
+          </p:cNvPr>
+          <p:cNvSpPr>
+            <a:spLocks xmlns:a="http://schemas.openxmlformats.org/drawingml/2006/main" noGrp="1"/>
+          </p:cNvSpPr>
+          <p:nvPr/>
+        </p:nvSpPr>
+        <p:spPr>
+          <a:xfrm xmlns:a="http://schemas.openxmlformats.org/drawingml/2006/main">
+            <a:off x="1162050" y="3952875"/>
+            <a:ext cx="400050" cy="400050"/>
           </a:xfrm>
           <a:prstGeom xmlns:a="http://schemas.openxmlformats.org/drawingml/2006/main" prst="rect">
             <a:avLst/>
@@ -8614,9 +8620,9 @@
           <a:lstStyle xmlns:a="http://schemas.openxmlformats.org/drawingml/2006/main"/>
           <a:p xmlns:a="http://schemas.openxmlformats.org/drawingml/2006/main">
             <a:pPr algn="ctr">
-              <a:defRPr sz="1350" b="1">
-                <a:solidFill>
-                  <a:srgbClr val="FFFFFF"/>
+              <a:defRPr sz="1125" b="1">
+                <a:solidFill>
+                  <a:srgbClr val="2C6E73"/>
                 </a:solidFill>
                 <a:latin typeface="Arial"/>
                 <a:ea typeface="Arial"/>
@@ -8624,9 +8630,9 @@
               </a:defRPr>
             </a:pPr>
             <a:r>
-              <a:rPr sz="1350" b="1">
-                <a:solidFill>
-                  <a:srgbClr val="FFFFFF"/>
+              <a:rPr sz="1125" b="1">
+                <a:solidFill>
+                  <a:srgbClr val="2C6E73"/>
                 </a:solidFill>
                 <a:latin typeface="Arial"/>
                 <a:ea typeface="Arial"/>
@@ -8642,19 +8648,19 @@
           <p:cNvPr id="19" name="">
             <a:extLst xmlns:a="http://schemas.openxmlformats.org/drawingml/2006/main">
               <a:ext uri="{FF2B5EF4-FFF2-40B4-BE49-F238E27FC236}">
-                <a16:creationId xmlns:a16="http://schemas.microsoft.com/office/drawing/2014/main" id="{F396FF39-93FB-44A5-84A2-CCF49E42D3B3}"/>
-              </a:ext>
-            </a:extLst>
-          </p:cNvPr>
-          <p:cNvSpPr>
-            <a:spLocks xmlns:a="http://schemas.openxmlformats.org/drawingml/2006/main" noGrp="1"/>
-          </p:cNvSpPr>
-          <p:nvPr/>
-        </p:nvSpPr>
-        <p:spPr>
-          <a:xfrm xmlns:a="http://schemas.openxmlformats.org/drawingml/2006/main">
-            <a:off x="1714500" y="3667125"/>
-            <a:ext cx="9429750" cy="609600"/>
+                <a16:creationId xmlns:a16="http://schemas.microsoft.com/office/drawing/2014/main" id="{F17F9DB7-EBE5-4CC9-A11F-BA7A425C0AF3}"/>
+              </a:ext>
+            </a:extLst>
+          </p:cNvPr>
+          <p:cNvSpPr>
+            <a:spLocks xmlns:a="http://schemas.openxmlformats.org/drawingml/2006/main" noGrp="1"/>
+          </p:cNvSpPr>
+          <p:nvPr/>
+        </p:nvSpPr>
+        <p:spPr>
+          <a:xfrm xmlns:a="http://schemas.openxmlformats.org/drawingml/2006/main">
+            <a:off x="1714500" y="3867150"/>
+            <a:ext cx="9525000" cy="809625"/>
           </a:xfrm>
           <a:prstGeom xmlns:a="http://schemas.openxmlformats.org/drawingml/2006/main" prst="rect">
             <a:avLst/>
@@ -8671,7 +8677,7 @@
           <a:lstStyle xmlns:a="http://schemas.openxmlformats.org/drawingml/2006/main"/>
           <a:p xmlns:a="http://schemas.openxmlformats.org/drawingml/2006/main">
             <a:pPr algn="l">
-              <a:defRPr sz="1500" b="0">
+              <a:defRPr sz="1725" b="0">
                 <a:solidFill>
                   <a:srgbClr val="17253A"/>
                 </a:solidFill>
@@ -8681,7 +8687,7 @@
               </a:defRPr>
             </a:pPr>
             <a:r>
-              <a:rPr sz="1500" b="0">
+              <a:rPr sz="1725" b="0">
                 <a:solidFill>
                   <a:srgbClr val="17253A"/>
                 </a:solidFill>
@@ -8689,7 +8695,7 @@
                 <a:ea typeface="Arial"/>
                 <a:cs typeface="Arial"/>
               </a:rPr>
-              <a:t>Complete the calculation: 36,435 seats.</a:t>
+              <a:t>125,000 - 88,565</a:t>
             </a:r>
           </a:p>
         </p:txBody>
@@ -8699,28 +8705,30 @@
           <p:cNvPr id="20" name="">
             <a:extLst xmlns:a="http://schemas.openxmlformats.org/drawingml/2006/main">
               <a:ext uri="{FF2B5EF4-FFF2-40B4-BE49-F238E27FC236}">
-                <a16:creationId xmlns:a16="http://schemas.microsoft.com/office/drawing/2014/main" id="{C3B25414-D4A6-43BC-B88A-50428ECB3C8B}"/>
-              </a:ext>
-            </a:extLst>
-          </p:cNvPr>
-          <p:cNvSpPr>
-            <a:spLocks xmlns:a="http://schemas.openxmlformats.org/drawingml/2006/main" noGrp="1"/>
-          </p:cNvSpPr>
-          <p:nvPr/>
-        </p:nvSpPr>
-        <p:spPr>
-          <a:xfrm xmlns:a="http://schemas.openxmlformats.org/drawingml/2006/main">
-            <a:off x="1000125" y="4476750"/>
-            <a:ext cx="476250" cy="476250"/>
-          </a:xfrm>
-          <a:prstGeom xmlns:a="http://schemas.openxmlformats.org/drawingml/2006/main" prst="ellipse">
+                <a16:creationId xmlns:a16="http://schemas.microsoft.com/office/drawing/2014/main" id="{56854425-A059-4B2A-A5F0-E2DB7623E9C5}"/>
+              </a:ext>
+            </a:extLst>
+          </p:cNvPr>
+          <p:cNvSpPr>
+            <a:spLocks xmlns:a="http://schemas.openxmlformats.org/drawingml/2006/main" noGrp="1"/>
+          </p:cNvSpPr>
+          <p:nvPr/>
+        </p:nvSpPr>
+        <p:spPr>
+          <a:xfrm xmlns:a="http://schemas.openxmlformats.org/drawingml/2006/main">
+            <a:off x="1714500" y="4695825"/>
+            <a:ext cx="9334500" cy="9525"/>
+          </a:xfrm>
+          <a:prstGeom xmlns:a="http://schemas.openxmlformats.org/drawingml/2006/main" prst="rect">
             <a:avLst/>
           </a:prstGeom>
           <a:solidFill xmlns:a="http://schemas.openxmlformats.org/drawingml/2006/main">
-            <a:srgbClr val="2C6E73"/>
+            <a:srgbClr val="D9E0E6"/>
           </a:solidFill>
           <a:ln xmlns:a="http://schemas.openxmlformats.org/drawingml/2006/main" w="0">
-            <a:noFill/>
+            <a:solidFill>
+              <a:srgbClr val="D9E0E6"/>
+            </a:solidFill>
           </a:ln>
         </p:spPr>
       </p:sp>
@@ -8729,19 +8737,19 @@
           <p:cNvPr id="21" name="">
             <a:extLst xmlns:a="http://schemas.openxmlformats.org/drawingml/2006/main">
               <a:ext uri="{FF2B5EF4-FFF2-40B4-BE49-F238E27FC236}">
-                <a16:creationId xmlns:a16="http://schemas.microsoft.com/office/drawing/2014/main" id="{A97BE52D-3AC2-4969-AF33-25B7E887CFCE}"/>
-              </a:ext>
-            </a:extLst>
-          </p:cNvPr>
-          <p:cNvSpPr>
-            <a:spLocks xmlns:a="http://schemas.openxmlformats.org/drawingml/2006/main" noGrp="1"/>
-          </p:cNvSpPr>
-          <p:nvPr/>
-        </p:nvSpPr>
-        <p:spPr>
-          <a:xfrm xmlns:a="http://schemas.openxmlformats.org/drawingml/2006/main">
-            <a:off x="1000125" y="4505325"/>
-            <a:ext cx="476250" cy="419100"/>
+                <a16:creationId xmlns:a16="http://schemas.microsoft.com/office/drawing/2014/main" id="{5C474F4A-FBF9-4C39-9053-6F94975F1D07}"/>
+              </a:ext>
+            </a:extLst>
+          </p:cNvPr>
+          <p:cNvSpPr>
+            <a:spLocks xmlns:a="http://schemas.openxmlformats.org/drawingml/2006/main" noGrp="1"/>
+          </p:cNvSpPr>
+          <p:nvPr/>
+        </p:nvSpPr>
+        <p:spPr>
+          <a:xfrm xmlns:a="http://schemas.openxmlformats.org/drawingml/2006/main">
+            <a:off x="1162050" y="4829175"/>
+            <a:ext cx="400050" cy="400050"/>
           </a:xfrm>
           <a:prstGeom xmlns:a="http://schemas.openxmlformats.org/drawingml/2006/main" prst="rect">
             <a:avLst/>
@@ -8758,9 +8766,9 @@
           <a:lstStyle xmlns:a="http://schemas.openxmlformats.org/drawingml/2006/main"/>
           <a:p xmlns:a="http://schemas.openxmlformats.org/drawingml/2006/main">
             <a:pPr algn="ctr">
-              <a:defRPr sz="1350" b="1">
-                <a:solidFill>
-                  <a:srgbClr val="FFFFFF"/>
+              <a:defRPr sz="1125" b="1">
+                <a:solidFill>
+                  <a:srgbClr val="2F785D"/>
                 </a:solidFill>
                 <a:latin typeface="Arial"/>
                 <a:ea typeface="Arial"/>
@@ -8768,9 +8776,9 @@
               </a:defRPr>
             </a:pPr>
             <a:r>
-              <a:rPr sz="1350" b="1">
-                <a:solidFill>
-                  <a:srgbClr val="FFFFFF"/>
+              <a:rPr sz="1125" b="1">
+                <a:solidFill>
+                  <a:srgbClr val="2F785D"/>
                 </a:solidFill>
                 <a:latin typeface="Arial"/>
                 <a:ea typeface="Arial"/>
@@ -8786,19 +8794,19 @@
           <p:cNvPr id="22" name="">
             <a:extLst xmlns:a="http://schemas.openxmlformats.org/drawingml/2006/main">
               <a:ext uri="{FF2B5EF4-FFF2-40B4-BE49-F238E27FC236}">
-                <a16:creationId xmlns:a16="http://schemas.microsoft.com/office/drawing/2014/main" id="{8DB0D403-9C92-47FA-B422-224394299B64}"/>
-              </a:ext>
-            </a:extLst>
-          </p:cNvPr>
-          <p:cNvSpPr>
-            <a:spLocks xmlns:a="http://schemas.openxmlformats.org/drawingml/2006/main" noGrp="1"/>
-          </p:cNvSpPr>
-          <p:nvPr/>
-        </p:nvSpPr>
-        <p:spPr>
-          <a:xfrm xmlns:a="http://schemas.openxmlformats.org/drawingml/2006/main">
-            <a:off x="1714500" y="4410075"/>
-            <a:ext cx="9429750" cy="609600"/>
+                <a16:creationId xmlns:a16="http://schemas.microsoft.com/office/drawing/2014/main" id="{F443FBC6-FB8D-4F5D-BCDA-020B66F25DED}"/>
+              </a:ext>
+            </a:extLst>
+          </p:cNvPr>
+          <p:cNvSpPr>
+            <a:spLocks xmlns:a="http://schemas.openxmlformats.org/drawingml/2006/main" noGrp="1"/>
+          </p:cNvSpPr>
+          <p:nvPr/>
+        </p:nvSpPr>
+        <p:spPr>
+          <a:xfrm xmlns:a="http://schemas.openxmlformats.org/drawingml/2006/main">
+            <a:off x="1714500" y="4743450"/>
+            <a:ext cx="9525000" cy="809625"/>
           </a:xfrm>
           <a:prstGeom xmlns:a="http://schemas.openxmlformats.org/drawingml/2006/main" prst="rect">
             <a:avLst/>
@@ -8815,7 +8823,7 @@
           <a:lstStyle xmlns:a="http://schemas.openxmlformats.org/drawingml/2006/main"/>
           <a:p xmlns:a="http://schemas.openxmlformats.org/drawingml/2006/main">
             <a:pPr algn="l">
-              <a:defRPr sz="1500" b="1">
+              <a:defRPr sz="1725" b="1">
                 <a:solidFill>
                   <a:srgbClr val="2F785D"/>
                 </a:solidFill>
@@ -8825,7 +8833,7 @@
               </a:defRPr>
             </a:pPr>
             <a:r>
-              <a:rPr sz="1500" b="1">
+              <a:rPr sz="1725" b="1">
                 <a:solidFill>
                   <a:srgbClr val="2F785D"/>
                 </a:solidFill>
@@ -8833,7 +8841,7 @@
                 <a:ea typeface="Arial"/>
                 <a:cs typeface="Arial"/>
               </a:rPr>
-              <a:t>Check the result: Complete each step, label sub-totals and check the final answer in context.</a:t>
+              <a:t>Seats remaining = 36,435</a:t>
             </a:r>
           </a:p>
         </p:txBody>
@@ -8841,7 +8849,7 @@
     </p:spTree>
     <p:extLst>
       <p:ext uri="{BB962C8B-B14F-4D97-AF65-F5344CB8AC3E}">
-        <p14:creationId xmlns:p14="http://schemas.microsoft.com/office/powerpoint/2010/main" val="2146198470"/>
+        <p14:creationId xmlns:p14="http://schemas.microsoft.com/office/powerpoint/2010/main" val="20979341"/>
       </p:ext>
     </p:extLst>
   </p:cSld>
@@ -9134,7 +9142,7 @@
           <p:cNvPr id="15" name="">
             <a:extLst xmlns:a="http://schemas.openxmlformats.org/drawingml/2006/main">
               <a:ext uri="{FF2B5EF4-FFF2-40B4-BE49-F238E27FC236}">
-                <a16:creationId xmlns:a16="http://schemas.microsoft.com/office/drawing/2014/main" id="{84D2F17E-988C-4BD3-A3DE-601BCCFF8F92}"/>
+                <a16:creationId xmlns:a16="http://schemas.microsoft.com/office/drawing/2014/main" id="{3F289EF2-865D-403C-B7E3-5767EB2001BD}"/>
               </a:ext>
             </a:extLst>
           </p:cNvPr>
@@ -9166,7 +9174,7 @@
           <p:cNvPr id="2" name="">
             <a:extLst xmlns:a="http://schemas.openxmlformats.org/drawingml/2006/main">
               <a:ext uri="{FF2B5EF4-FFF2-40B4-BE49-F238E27FC236}">
-                <a16:creationId xmlns:a16="http://schemas.microsoft.com/office/drawing/2014/main" id="{90FC5A91-6FD5-49DD-93A1-8149B85D9327}"/>
+                <a16:creationId xmlns:a16="http://schemas.microsoft.com/office/drawing/2014/main" id="{6ABC7F8D-8518-405E-9A4E-98EB09ECC167}"/>
               </a:ext>
             </a:extLst>
           </p:cNvPr>
@@ -9223,7 +9231,7 @@
           <p:cNvPr id="3" name="">
             <a:extLst xmlns:a="http://schemas.openxmlformats.org/drawingml/2006/main">
               <a:ext uri="{FF2B5EF4-FFF2-40B4-BE49-F238E27FC236}">
-                <a16:creationId xmlns:a16="http://schemas.microsoft.com/office/drawing/2014/main" id="{424D4FFB-2784-42DF-8080-B9D277720373}"/>
+                <a16:creationId xmlns:a16="http://schemas.microsoft.com/office/drawing/2014/main" id="{E6E5F724-15F6-4CB0-B4F5-8E9EE6DCF421}"/>
               </a:ext>
             </a:extLst>
           </p:cNvPr>
@@ -9255,7 +9263,7 @@
           <p:cNvPr id="4" name="">
             <a:extLst xmlns:a="http://schemas.openxmlformats.org/drawingml/2006/main">
               <a:ext uri="{FF2B5EF4-FFF2-40B4-BE49-F238E27FC236}">
-                <a16:creationId xmlns:a16="http://schemas.microsoft.com/office/drawing/2014/main" id="{C6707488-8D2A-433D-A965-344AA0FE2495}"/>
+                <a16:creationId xmlns:a16="http://schemas.microsoft.com/office/drawing/2014/main" id="{99C12089-7CF3-4416-8D2F-47477466D395}"/>
               </a:ext>
             </a:extLst>
           </p:cNvPr>
@@ -9312,7 +9320,7 @@
           <p:cNvPr id="5" name="">
             <a:extLst xmlns:a="http://schemas.openxmlformats.org/drawingml/2006/main">
               <a:ext uri="{FF2B5EF4-FFF2-40B4-BE49-F238E27FC236}">
-                <a16:creationId xmlns:a16="http://schemas.microsoft.com/office/drawing/2014/main" id="{643E95F2-6B1C-4F09-B650-DC99576FF132}"/>
+                <a16:creationId xmlns:a16="http://schemas.microsoft.com/office/drawing/2014/main" id="{D51C5605-FE64-48E8-AD15-49765AE62DEC}"/>
               </a:ext>
             </a:extLst>
           </p:cNvPr>
@@ -9369,7 +9377,7 @@
           <p:cNvPr id="6" name="">
             <a:extLst xmlns:a="http://schemas.openxmlformats.org/drawingml/2006/main">
               <a:ext uri="{FF2B5EF4-FFF2-40B4-BE49-F238E27FC236}">
-                <a16:creationId xmlns:a16="http://schemas.microsoft.com/office/drawing/2014/main" id="{2D39AA16-C537-4158-9E51-AEBC1404140E}"/>
+                <a16:creationId xmlns:a16="http://schemas.microsoft.com/office/drawing/2014/main" id="{455B7CF5-E3E7-4B75-B83E-E1A486DE71A4}"/>
               </a:ext>
             </a:extLst>
           </p:cNvPr>
@@ -9426,7 +9434,7 @@
           <p:cNvPr id="7" name="">
             <a:extLst xmlns:a="http://schemas.openxmlformats.org/drawingml/2006/main">
               <a:ext uri="{FF2B5EF4-FFF2-40B4-BE49-F238E27FC236}">
-                <a16:creationId xmlns:a16="http://schemas.microsoft.com/office/drawing/2014/main" id="{D9AE8EF5-6C48-4DB3-9E2E-A88E877DCCD6}"/>
+                <a16:creationId xmlns:a16="http://schemas.microsoft.com/office/drawing/2014/main" id="{16C20F06-37ED-45F4-8586-E4331E670F59}"/>
               </a:ext>
             </a:extLst>
           </p:cNvPr>
@@ -9458,7 +9466,7 @@
           <p:cNvPr id="8" name="">
             <a:extLst xmlns:a="http://schemas.openxmlformats.org/drawingml/2006/main">
               <a:ext uri="{FF2B5EF4-FFF2-40B4-BE49-F238E27FC236}">
-                <a16:creationId xmlns:a16="http://schemas.microsoft.com/office/drawing/2014/main" id="{974A5E04-3A30-4278-9EEC-B9BBF93CF99A}"/>
+                <a16:creationId xmlns:a16="http://schemas.microsoft.com/office/drawing/2014/main" id="{30A7E270-1B4A-40E6-BA3C-8CE46B6E4730}"/>
               </a:ext>
             </a:extLst>
           </p:cNvPr>
@@ -9515,7 +9523,7 @@
           <p:cNvPr id="9" name="">
             <a:extLst xmlns:a="http://schemas.openxmlformats.org/drawingml/2006/main">
               <a:ext uri="{FF2B5EF4-FFF2-40B4-BE49-F238E27FC236}">
-                <a16:creationId xmlns:a16="http://schemas.microsoft.com/office/drawing/2014/main" id="{CCBB6E0F-497F-4F2C-800F-7315204D8CEA}"/>
+                <a16:creationId xmlns:a16="http://schemas.microsoft.com/office/drawing/2014/main" id="{C1000AA5-9D28-44B0-9575-7465C18BA898}"/>
               </a:ext>
             </a:extLst>
           </p:cNvPr>
@@ -9572,7 +9580,7 @@
           <p:cNvPr id="10" name="">
             <a:extLst xmlns:a="http://schemas.openxmlformats.org/drawingml/2006/main">
               <a:ext uri="{FF2B5EF4-FFF2-40B4-BE49-F238E27FC236}">
-                <a16:creationId xmlns:a16="http://schemas.microsoft.com/office/drawing/2014/main" id="{0275A820-8EB2-46C6-8F4F-0B901CF1156C}"/>
+                <a16:creationId xmlns:a16="http://schemas.microsoft.com/office/drawing/2014/main" id="{04175534-FD3C-40F1-978B-505C1CCEF67A}"/>
               </a:ext>
             </a:extLst>
           </p:cNvPr>
@@ -9629,7 +9637,7 @@
           <p:cNvPr id="11" name="">
             <a:extLst xmlns:a="http://schemas.openxmlformats.org/drawingml/2006/main">
               <a:ext uri="{FF2B5EF4-FFF2-40B4-BE49-F238E27FC236}">
-                <a16:creationId xmlns:a16="http://schemas.microsoft.com/office/drawing/2014/main" id="{DBEB1B05-0EB8-44A8-808C-22C66CAA1204}"/>
+                <a16:creationId xmlns:a16="http://schemas.microsoft.com/office/drawing/2014/main" id="{F0FDF11A-B642-44C6-8AF6-C857CBF92B3B}"/>
               </a:ext>
             </a:extLst>
           </p:cNvPr>
@@ -9686,7 +9694,7 @@
           <p:cNvPr id="12" name="">
             <a:extLst xmlns:a="http://schemas.openxmlformats.org/drawingml/2006/main">
               <a:ext uri="{FF2B5EF4-FFF2-40B4-BE49-F238E27FC236}">
-                <a16:creationId xmlns:a16="http://schemas.microsoft.com/office/drawing/2014/main" id="{060386A3-BCBF-41FB-BE6E-0D6CF05D702A}"/>
+                <a16:creationId xmlns:a16="http://schemas.microsoft.com/office/drawing/2014/main" id="{44D84880-0AF7-4C9E-BD1B-C20020A3839A}"/>
               </a:ext>
             </a:extLst>
           </p:cNvPr>
@@ -9718,7 +9726,7 @@
           <p:cNvPr id="13" name="">
             <a:extLst xmlns:a="http://schemas.openxmlformats.org/drawingml/2006/main">
               <a:ext uri="{FF2B5EF4-FFF2-40B4-BE49-F238E27FC236}">
-                <a16:creationId xmlns:a16="http://schemas.microsoft.com/office/drawing/2014/main" id="{F7D484B8-0152-4247-BBD7-6E65F89D123C}"/>
+                <a16:creationId xmlns:a16="http://schemas.microsoft.com/office/drawing/2014/main" id="{C12CF847-73BE-4C48-9573-5A1931C4C76D}"/>
               </a:ext>
             </a:extLst>
           </p:cNvPr>
@@ -9775,7 +9783,7 @@
           <p:cNvPr id="14" name="">
             <a:extLst xmlns:a="http://schemas.openxmlformats.org/drawingml/2006/main">
               <a:ext uri="{FF2B5EF4-FFF2-40B4-BE49-F238E27FC236}">
-                <a16:creationId xmlns:a16="http://schemas.microsoft.com/office/drawing/2014/main" id="{9FD7C725-94A7-4D7C-8A85-559E949E3B08}"/>
+                <a16:creationId xmlns:a16="http://schemas.microsoft.com/office/drawing/2014/main" id="{49F2A3CB-74A7-42B2-B2FD-2CA2021DF1A4}"/>
               </a:ext>
             </a:extLst>
           </p:cNvPr>
@@ -9830,7 +9838,7 @@
     </p:spTree>
     <p:extLst>
       <p:ext uri="{BB962C8B-B14F-4D97-AF65-F5344CB8AC3E}">
-        <p14:creationId xmlns:p14="http://schemas.microsoft.com/office/powerpoint/2010/main" val="1050652056"/>
+        <p14:creationId xmlns:p14="http://schemas.microsoft.com/office/powerpoint/2010/main" val="193819582"/>
       </p:ext>
     </p:extLst>
   </p:cSld>
@@ -10031,7 +10039,7 @@
           <p:cNvPr id="16" name="">
             <a:extLst xmlns:a="http://schemas.openxmlformats.org/drawingml/2006/main">
               <a:ext uri="{FF2B5EF4-FFF2-40B4-BE49-F238E27FC236}">
-                <a16:creationId xmlns:a16="http://schemas.microsoft.com/office/drawing/2014/main" id="{CF04C31E-4809-4FE1-96DE-597130B7FAE7}"/>
+                <a16:creationId xmlns:a16="http://schemas.microsoft.com/office/drawing/2014/main" id="{51D0DFFA-13EA-433F-97C1-4FC2ADAACB4F}"/>
               </a:ext>
             </a:extLst>
           </p:cNvPr>
@@ -10063,7 +10071,7 @@
           <p:cNvPr id="2" name="">
             <a:extLst xmlns:a="http://schemas.openxmlformats.org/drawingml/2006/main">
               <a:ext uri="{FF2B5EF4-FFF2-40B4-BE49-F238E27FC236}">
-                <a16:creationId xmlns:a16="http://schemas.microsoft.com/office/drawing/2014/main" id="{A0DE050D-A046-4D98-A175-EB877B2DFC27}"/>
+                <a16:creationId xmlns:a16="http://schemas.microsoft.com/office/drawing/2014/main" id="{420DCF51-1C60-43DB-A10F-522215AEF3B0}"/>
               </a:ext>
             </a:extLst>
           </p:cNvPr>
@@ -10120,7 +10128,7 @@
           <p:cNvPr id="3" name="">
             <a:extLst xmlns:a="http://schemas.openxmlformats.org/drawingml/2006/main">
               <a:ext uri="{FF2B5EF4-FFF2-40B4-BE49-F238E27FC236}">
-                <a16:creationId xmlns:a16="http://schemas.microsoft.com/office/drawing/2014/main" id="{D6F3DE04-97BF-4FBA-AE67-4B114705F174}"/>
+                <a16:creationId xmlns:a16="http://schemas.microsoft.com/office/drawing/2014/main" id="{038B1CDD-04C6-4FE9-AED0-BF5C2C63FAB8}"/>
               </a:ext>
             </a:extLst>
           </p:cNvPr>
@@ -10152,7 +10160,7 @@
           <p:cNvPr id="4" name="">
             <a:extLst xmlns:a="http://schemas.openxmlformats.org/drawingml/2006/main">
               <a:ext uri="{FF2B5EF4-FFF2-40B4-BE49-F238E27FC236}">
-                <a16:creationId xmlns:a16="http://schemas.microsoft.com/office/drawing/2014/main" id="{E4E43DF1-2D0F-4710-9D3D-7DFF7B79439C}"/>
+                <a16:creationId xmlns:a16="http://schemas.microsoft.com/office/drawing/2014/main" id="{611144A6-FE6B-4A27-BD52-ECF7F3598593}"/>
               </a:ext>
             </a:extLst>
           </p:cNvPr>
@@ -10209,7 +10217,7 @@
           <p:cNvPr id="5" name="">
             <a:extLst xmlns:a="http://schemas.openxmlformats.org/drawingml/2006/main">
               <a:ext uri="{FF2B5EF4-FFF2-40B4-BE49-F238E27FC236}">
-                <a16:creationId xmlns:a16="http://schemas.microsoft.com/office/drawing/2014/main" id="{0B194A9C-13FC-46A2-8B1E-4F29B523744A}"/>
+                <a16:creationId xmlns:a16="http://schemas.microsoft.com/office/drawing/2014/main" id="{61E2369D-1622-40F5-802B-28345A612554}"/>
               </a:ext>
             </a:extLst>
           </p:cNvPr>
@@ -10266,7 +10274,7 @@
           <p:cNvPr id="6" name="">
             <a:extLst xmlns:a="http://schemas.openxmlformats.org/drawingml/2006/main">
               <a:ext uri="{FF2B5EF4-FFF2-40B4-BE49-F238E27FC236}">
-                <a16:creationId xmlns:a16="http://schemas.microsoft.com/office/drawing/2014/main" id="{87F72FB4-5083-40B0-B7DF-D9A6F5FF1B37}"/>
+                <a16:creationId xmlns:a16="http://schemas.microsoft.com/office/drawing/2014/main" id="{EA9A473E-7A83-4646-B9FE-8E6B88341F0A}"/>
               </a:ext>
             </a:extLst>
           </p:cNvPr>
@@ -10323,7 +10331,7 @@
           <p:cNvPr id="7" name="">
             <a:extLst xmlns:a="http://schemas.openxmlformats.org/drawingml/2006/main">
               <a:ext uri="{FF2B5EF4-FFF2-40B4-BE49-F238E27FC236}">
-                <a16:creationId xmlns:a16="http://schemas.microsoft.com/office/drawing/2014/main" id="{B434CFBE-F9BA-4718-9258-06F39689C508}"/>
+                <a16:creationId xmlns:a16="http://schemas.microsoft.com/office/drawing/2014/main" id="{35139986-9DDA-4321-9E3D-0561630A3AEE}"/>
               </a:ext>
             </a:extLst>
           </p:cNvPr>
@@ -10355,7 +10363,7 @@
           <p:cNvPr id="8" name="">
             <a:extLst xmlns:a="http://schemas.openxmlformats.org/drawingml/2006/main">
               <a:ext uri="{FF2B5EF4-FFF2-40B4-BE49-F238E27FC236}">
-                <a16:creationId xmlns:a16="http://schemas.microsoft.com/office/drawing/2014/main" id="{5EF9CB75-21CF-4E53-BD32-CEB7C4F24F97}"/>
+                <a16:creationId xmlns:a16="http://schemas.microsoft.com/office/drawing/2014/main" id="{2FCE5724-D50C-4404-8933-C45E75D2EBDA}"/>
               </a:ext>
             </a:extLst>
           </p:cNvPr>
@@ -10412,7 +10420,7 @@
           <p:cNvPr id="9" name="">
             <a:extLst xmlns:a="http://schemas.openxmlformats.org/drawingml/2006/main">
               <a:ext uri="{FF2B5EF4-FFF2-40B4-BE49-F238E27FC236}">
-                <a16:creationId xmlns:a16="http://schemas.microsoft.com/office/drawing/2014/main" id="{66437C1B-7502-452B-8894-827B28D29293}"/>
+                <a16:creationId xmlns:a16="http://schemas.microsoft.com/office/drawing/2014/main" id="{DB22F04B-68A3-4E82-9648-979C33BE0683}"/>
               </a:ext>
             </a:extLst>
           </p:cNvPr>
@@ -10469,7 +10477,7 @@
           <p:cNvPr id="10" name="">
             <a:extLst xmlns:a="http://schemas.openxmlformats.org/drawingml/2006/main">
               <a:ext uri="{FF2B5EF4-FFF2-40B4-BE49-F238E27FC236}">
-                <a16:creationId xmlns:a16="http://schemas.microsoft.com/office/drawing/2014/main" id="{097B8190-CF84-43CB-9851-BD1F321EFE44}"/>
+                <a16:creationId xmlns:a16="http://schemas.microsoft.com/office/drawing/2014/main" id="{BD27E74D-2034-48C9-AE67-8252DCA8CC8F}"/>
               </a:ext>
             </a:extLst>
           </p:cNvPr>
@@ -10526,7 +10534,7 @@
           <p:cNvPr id="11" name="">
             <a:extLst xmlns:a="http://schemas.openxmlformats.org/drawingml/2006/main">
               <a:ext uri="{FF2B5EF4-FFF2-40B4-BE49-F238E27FC236}">
-                <a16:creationId xmlns:a16="http://schemas.microsoft.com/office/drawing/2014/main" id="{1A05CBA7-BCD9-47B9-B456-B66BFF7D0952}"/>
+                <a16:creationId xmlns:a16="http://schemas.microsoft.com/office/drawing/2014/main" id="{10FA165A-6114-49CE-857A-1A5F9479EE84}"/>
               </a:ext>
             </a:extLst>
           </p:cNvPr>
@@ -10583,7 +10591,7 @@
           <p:cNvPr id="12" name="">
             <a:extLst xmlns:a="http://schemas.openxmlformats.org/drawingml/2006/main">
               <a:ext uri="{FF2B5EF4-FFF2-40B4-BE49-F238E27FC236}">
-                <a16:creationId xmlns:a16="http://schemas.microsoft.com/office/drawing/2014/main" id="{89BFA113-6067-40BD-B1AD-2649FE0EC7A4}"/>
+                <a16:creationId xmlns:a16="http://schemas.microsoft.com/office/drawing/2014/main" id="{8117318B-CB9F-48EB-A754-2D774945754F}"/>
               </a:ext>
             </a:extLst>
           </p:cNvPr>
@@ -10640,7 +10648,7 @@
           <p:cNvPr id="13" name="">
             <a:extLst xmlns:a="http://schemas.openxmlformats.org/drawingml/2006/main">
               <a:ext uri="{FF2B5EF4-FFF2-40B4-BE49-F238E27FC236}">
-                <a16:creationId xmlns:a16="http://schemas.microsoft.com/office/drawing/2014/main" id="{669F2225-C1CC-41A1-8B2B-67BE21602F8A}"/>
+                <a16:creationId xmlns:a16="http://schemas.microsoft.com/office/drawing/2014/main" id="{6E0C3EDC-FEF6-450F-BD32-FF96818764FA}"/>
               </a:ext>
             </a:extLst>
           </p:cNvPr>
@@ -10697,7 +10705,7 @@
           <p:cNvPr id="14" name="">
             <a:extLst xmlns:a="http://schemas.openxmlformats.org/drawingml/2006/main">
               <a:ext uri="{FF2B5EF4-FFF2-40B4-BE49-F238E27FC236}">
-                <a16:creationId xmlns:a16="http://schemas.microsoft.com/office/drawing/2014/main" id="{FAD65C45-4016-41CA-B0E8-77DF19CF0FCC}"/>
+                <a16:creationId xmlns:a16="http://schemas.microsoft.com/office/drawing/2014/main" id="{D538E3A3-DB70-4317-BC7D-AB8786E1711E}"/>
               </a:ext>
             </a:extLst>
           </p:cNvPr>
@@ -10754,7 +10762,7 @@
           <p:cNvPr id="15" name="">
             <a:extLst xmlns:a="http://schemas.openxmlformats.org/drawingml/2006/main">
               <a:ext uri="{FF2B5EF4-FFF2-40B4-BE49-F238E27FC236}">
-                <a16:creationId xmlns:a16="http://schemas.microsoft.com/office/drawing/2014/main" id="{2BAE1915-E571-45DF-BA71-C370FB35C2EA}"/>
+                <a16:creationId xmlns:a16="http://schemas.microsoft.com/office/drawing/2014/main" id="{BCDC6E25-7997-4957-8D82-334D52E70067}"/>
               </a:ext>
             </a:extLst>
           </p:cNvPr>
@@ -10809,7 +10817,7 @@
     </p:spTree>
     <p:extLst>
       <p:ext uri="{BB962C8B-B14F-4D97-AF65-F5344CB8AC3E}">
-        <p14:creationId xmlns:p14="http://schemas.microsoft.com/office/powerpoint/2010/main" val="2084029049"/>
+        <p14:creationId xmlns:p14="http://schemas.microsoft.com/office/powerpoint/2010/main" val="1886180084"/>
       </p:ext>
     </p:extLst>
   </p:cSld>
@@ -10964,7 +10972,7 @@
           <p:cNvPr id="16" name="">
             <a:extLst xmlns:a="http://schemas.openxmlformats.org/drawingml/2006/main">
               <a:ext uri="{FF2B5EF4-FFF2-40B4-BE49-F238E27FC236}">
-                <a16:creationId xmlns:a16="http://schemas.microsoft.com/office/drawing/2014/main" id="{89988292-7748-4002-8F89-DB33AC2FD87B}"/>
+                <a16:creationId xmlns:a16="http://schemas.microsoft.com/office/drawing/2014/main" id="{FDA026DE-38D6-44EE-8444-47FF062AFB93}"/>
               </a:ext>
             </a:extLst>
           </p:cNvPr>
@@ -10996,7 +11004,7 @@
           <p:cNvPr id="2" name="">
             <a:extLst xmlns:a="http://schemas.openxmlformats.org/drawingml/2006/main">
               <a:ext uri="{FF2B5EF4-FFF2-40B4-BE49-F238E27FC236}">
-                <a16:creationId xmlns:a16="http://schemas.microsoft.com/office/drawing/2014/main" id="{4F6488CA-5088-4D2F-AFDA-23916BB7A7F4}"/>
+                <a16:creationId xmlns:a16="http://schemas.microsoft.com/office/drawing/2014/main" id="{021FD7BD-F767-40FE-A780-9638354B3263}"/>
               </a:ext>
             </a:extLst>
           </p:cNvPr>
@@ -11053,7 +11061,7 @@
           <p:cNvPr id="3" name="">
             <a:extLst xmlns:a="http://schemas.openxmlformats.org/drawingml/2006/main">
               <a:ext uri="{FF2B5EF4-FFF2-40B4-BE49-F238E27FC236}">
-                <a16:creationId xmlns:a16="http://schemas.microsoft.com/office/drawing/2014/main" id="{BCA58E01-9D45-4142-A8F7-467CD10D107E}"/>
+                <a16:creationId xmlns:a16="http://schemas.microsoft.com/office/drawing/2014/main" id="{9CC36CE0-8F99-4436-B9C0-6186DB0DBE61}"/>
               </a:ext>
             </a:extLst>
           </p:cNvPr>
@@ -11085,7 +11093,7 @@
           <p:cNvPr id="4" name="">
             <a:extLst xmlns:a="http://schemas.openxmlformats.org/drawingml/2006/main">
               <a:ext uri="{FF2B5EF4-FFF2-40B4-BE49-F238E27FC236}">
-                <a16:creationId xmlns:a16="http://schemas.microsoft.com/office/drawing/2014/main" id="{D7B937BD-E49D-4800-829A-A5AE6902488E}"/>
+                <a16:creationId xmlns:a16="http://schemas.microsoft.com/office/drawing/2014/main" id="{B8E83A6B-E752-463E-8070-B531FBD4CAE9}"/>
               </a:ext>
             </a:extLst>
           </p:cNvPr>
@@ -11142,7 +11150,7 @@
           <p:cNvPr id="5" name="">
             <a:extLst xmlns:a="http://schemas.openxmlformats.org/drawingml/2006/main">
               <a:ext uri="{FF2B5EF4-FFF2-40B4-BE49-F238E27FC236}">
-                <a16:creationId xmlns:a16="http://schemas.microsoft.com/office/drawing/2014/main" id="{E5ED67D1-D545-4742-A6A4-91EAEF68E609}"/>
+                <a16:creationId xmlns:a16="http://schemas.microsoft.com/office/drawing/2014/main" id="{23181CBF-9F86-40B3-802A-BF5C084F5E10}"/>
               </a:ext>
             </a:extLst>
           </p:cNvPr>
@@ -11199,7 +11207,7 @@
           <p:cNvPr id="6" name="">
             <a:extLst xmlns:a="http://schemas.openxmlformats.org/drawingml/2006/main">
               <a:ext uri="{FF2B5EF4-FFF2-40B4-BE49-F238E27FC236}">
-                <a16:creationId xmlns:a16="http://schemas.microsoft.com/office/drawing/2014/main" id="{06BEE525-8B17-4E4D-B8E2-A39B88EE552F}"/>
+                <a16:creationId xmlns:a16="http://schemas.microsoft.com/office/drawing/2014/main" id="{08D758D5-444E-425B-9428-8778C8BE838A}"/>
               </a:ext>
             </a:extLst>
           </p:cNvPr>
@@ -11256,7 +11264,7 @@
           <p:cNvPr id="7" name="">
             <a:extLst xmlns:a="http://schemas.openxmlformats.org/drawingml/2006/main">
               <a:ext uri="{FF2B5EF4-FFF2-40B4-BE49-F238E27FC236}">
-                <a16:creationId xmlns:a16="http://schemas.microsoft.com/office/drawing/2014/main" id="{3048572F-99A3-4A2A-9314-861033380581}"/>
+                <a16:creationId xmlns:a16="http://schemas.microsoft.com/office/drawing/2014/main" id="{0DAE7E9D-F034-4C9B-B3A8-62135AE31CD6}"/>
               </a:ext>
             </a:extLst>
           </p:cNvPr>
@@ -11288,7 +11296,7 @@
           <p:cNvPr id="8" name="">
             <a:extLst xmlns:a="http://schemas.openxmlformats.org/drawingml/2006/main">
               <a:ext uri="{FF2B5EF4-FFF2-40B4-BE49-F238E27FC236}">
-                <a16:creationId xmlns:a16="http://schemas.microsoft.com/office/drawing/2014/main" id="{9ABB2164-3C60-4E1D-8AF5-9DF429BDF719}"/>
+                <a16:creationId xmlns:a16="http://schemas.microsoft.com/office/drawing/2014/main" id="{B890FECA-FF40-4161-8855-97EC0675B4BA}"/>
               </a:ext>
             </a:extLst>
           </p:cNvPr>
@@ -11345,7 +11353,7 @@
           <p:cNvPr id="9" name="">
             <a:extLst xmlns:a="http://schemas.openxmlformats.org/drawingml/2006/main">
               <a:ext uri="{FF2B5EF4-FFF2-40B4-BE49-F238E27FC236}">
-                <a16:creationId xmlns:a16="http://schemas.microsoft.com/office/drawing/2014/main" id="{F324E07C-D6C4-4B06-ACA0-175DE8C30BB7}"/>
+                <a16:creationId xmlns:a16="http://schemas.microsoft.com/office/drawing/2014/main" id="{8493C9F6-21FE-4409-966D-76A1C0B25693}"/>
               </a:ext>
             </a:extLst>
           </p:cNvPr>
@@ -11406,7 +11414,7 @@
           <p:nvPr/>
         </p:nvPicPr>
         <p:blipFill>
-          <a:blip xmlns:r="http://schemas.openxmlformats.org/officeDocument/2006/relationships" xmlns:a="http://schemas.openxmlformats.org/drawingml/2006/main" r:embed="R51d6781fb6df4100"/>
+          <a:blip xmlns:r="http://schemas.openxmlformats.org/officeDocument/2006/relationships" xmlns:a="http://schemas.openxmlformats.org/drawingml/2006/main" r:embed="R3b888e1e15254268"/>
           <a:stretch xmlns:a="http://schemas.openxmlformats.org/drawingml/2006/main"/>
         </p:blipFill>
         <p:spPr>
@@ -11424,7 +11432,7 @@
           <p:cNvPr id="11" name="">
             <a:extLst xmlns:a="http://schemas.openxmlformats.org/drawingml/2006/main">
               <a:ext uri="{FF2B5EF4-FFF2-40B4-BE49-F238E27FC236}">
-                <a16:creationId xmlns:a16="http://schemas.microsoft.com/office/drawing/2014/main" id="{6D2BF7D0-F9B1-44EB-B297-4FE5D8DCFE11}"/>
+                <a16:creationId xmlns:a16="http://schemas.microsoft.com/office/drawing/2014/main" id="{0BFEA0AF-3115-4AC0-941C-ECD9462E7BEF}"/>
               </a:ext>
             </a:extLst>
           </p:cNvPr>
@@ -11481,7 +11489,7 @@
           <p:cNvPr id="12" name="">
             <a:extLst xmlns:a="http://schemas.openxmlformats.org/drawingml/2006/main">
               <a:ext uri="{FF2B5EF4-FFF2-40B4-BE49-F238E27FC236}">
-                <a16:creationId xmlns:a16="http://schemas.microsoft.com/office/drawing/2014/main" id="{49B6B99D-0140-4BBB-97CA-059A51BF70B3}"/>
+                <a16:creationId xmlns:a16="http://schemas.microsoft.com/office/drawing/2014/main" id="{B2870DAD-A516-483C-8043-5E538086DE15}"/>
               </a:ext>
             </a:extLst>
           </p:cNvPr>
@@ -11538,7 +11546,7 @@
           <p:cNvPr id="13" name="">
             <a:extLst xmlns:a="http://schemas.openxmlformats.org/drawingml/2006/main">
               <a:ext uri="{FF2B5EF4-FFF2-40B4-BE49-F238E27FC236}">
-                <a16:creationId xmlns:a16="http://schemas.microsoft.com/office/drawing/2014/main" id="{ED336BF7-B818-4FB3-B04E-2FD8C492D154}"/>
+                <a16:creationId xmlns:a16="http://schemas.microsoft.com/office/drawing/2014/main" id="{C87B7286-DFD4-4885-9EA5-2639162061A0}"/>
               </a:ext>
             </a:extLst>
           </p:cNvPr>
@@ -11570,7 +11578,7 @@
           <p:cNvPr id="14" name="">
             <a:extLst xmlns:a="http://schemas.openxmlformats.org/drawingml/2006/main">
               <a:ext uri="{FF2B5EF4-FFF2-40B4-BE49-F238E27FC236}">
-                <a16:creationId xmlns:a16="http://schemas.microsoft.com/office/drawing/2014/main" id="{C116EAC6-9126-4FAA-997C-EA3DEA5021FC}"/>
+                <a16:creationId xmlns:a16="http://schemas.microsoft.com/office/drawing/2014/main" id="{A82FD631-AAF4-4DBC-8E8C-F19D63A74B20}"/>
               </a:ext>
             </a:extLst>
           </p:cNvPr>
@@ -11627,7 +11635,7 @@
           <p:cNvPr id="15" name="">
             <a:extLst xmlns:a="http://schemas.openxmlformats.org/drawingml/2006/main">
               <a:ext uri="{FF2B5EF4-FFF2-40B4-BE49-F238E27FC236}">
-                <a16:creationId xmlns:a16="http://schemas.microsoft.com/office/drawing/2014/main" id="{6B1C68F3-4589-4EE9-B09E-28CC5D7DFE8F}"/>
+                <a16:creationId xmlns:a16="http://schemas.microsoft.com/office/drawing/2014/main" id="{6E53BB89-32DC-4BBF-9680-BC4BA2C058E0}"/>
               </a:ext>
             </a:extLst>
           </p:cNvPr>
@@ -11682,7 +11690,7 @@
     </p:spTree>
     <p:extLst>
       <p:ext uri="{BB962C8B-B14F-4D97-AF65-F5344CB8AC3E}">
-        <p14:creationId xmlns:p14="http://schemas.microsoft.com/office/powerpoint/2010/main" val="452451248"/>
+        <p14:creationId xmlns:p14="http://schemas.microsoft.com/office/powerpoint/2010/main" val="721928097"/>
       </p:ext>
     </p:extLst>
   </p:cSld>
@@ -11837,7 +11845,7 @@
           <p:cNvPr id="23" name="">
             <a:extLst xmlns:a="http://schemas.openxmlformats.org/drawingml/2006/main">
               <a:ext uri="{FF2B5EF4-FFF2-40B4-BE49-F238E27FC236}">
-                <a16:creationId xmlns:a16="http://schemas.microsoft.com/office/drawing/2014/main" id="{3FBC5BDD-5453-48B7-B600-F3F518C128D0}"/>
+                <a16:creationId xmlns:a16="http://schemas.microsoft.com/office/drawing/2014/main" id="{9C017938-D997-4E83-85EC-C257A1A08312}"/>
               </a:ext>
             </a:extLst>
           </p:cNvPr>
@@ -11869,7 +11877,7 @@
           <p:cNvPr id="2" name="">
             <a:extLst xmlns:a="http://schemas.openxmlformats.org/drawingml/2006/main">
               <a:ext uri="{FF2B5EF4-FFF2-40B4-BE49-F238E27FC236}">
-                <a16:creationId xmlns:a16="http://schemas.microsoft.com/office/drawing/2014/main" id="{3487EECA-9363-4957-94EB-33DFC585AEFD}"/>
+                <a16:creationId xmlns:a16="http://schemas.microsoft.com/office/drawing/2014/main" id="{E9A34418-BE73-4308-9FA0-2E9AFD1B1255}"/>
               </a:ext>
             </a:extLst>
           </p:cNvPr>
@@ -11926,7 +11934,7 @@
           <p:cNvPr id="3" name="">
             <a:extLst xmlns:a="http://schemas.openxmlformats.org/drawingml/2006/main">
               <a:ext uri="{FF2B5EF4-FFF2-40B4-BE49-F238E27FC236}">
-                <a16:creationId xmlns:a16="http://schemas.microsoft.com/office/drawing/2014/main" id="{E33B226B-C331-4BF4-9E8C-A6880011F936}"/>
+                <a16:creationId xmlns:a16="http://schemas.microsoft.com/office/drawing/2014/main" id="{EED1BCEC-B119-48C4-982B-1848345C63F9}"/>
               </a:ext>
             </a:extLst>
           </p:cNvPr>
@@ -11958,7 +11966,7 @@
           <p:cNvPr id="4" name="">
             <a:extLst xmlns:a="http://schemas.openxmlformats.org/drawingml/2006/main">
               <a:ext uri="{FF2B5EF4-FFF2-40B4-BE49-F238E27FC236}">
-                <a16:creationId xmlns:a16="http://schemas.microsoft.com/office/drawing/2014/main" id="{4C81E564-B1BB-4FEA-925A-1D7B974BC453}"/>
+                <a16:creationId xmlns:a16="http://schemas.microsoft.com/office/drawing/2014/main" id="{267CA179-5D16-42AA-ADE5-AA5849F4B043}"/>
               </a:ext>
             </a:extLst>
           </p:cNvPr>
@@ -12015,7 +12023,7 @@
           <p:cNvPr id="5" name="">
             <a:extLst xmlns:a="http://schemas.openxmlformats.org/drawingml/2006/main">
               <a:ext uri="{FF2B5EF4-FFF2-40B4-BE49-F238E27FC236}">
-                <a16:creationId xmlns:a16="http://schemas.microsoft.com/office/drawing/2014/main" id="{9A9699A2-7231-4784-81F5-0EC5FE21ED63}"/>
+                <a16:creationId xmlns:a16="http://schemas.microsoft.com/office/drawing/2014/main" id="{3A3F0072-2FBE-43BB-8E5D-0BC476C5F991}"/>
               </a:ext>
             </a:extLst>
           </p:cNvPr>
@@ -12072,7 +12080,7 @@
           <p:cNvPr id="6" name="">
             <a:extLst xmlns:a="http://schemas.openxmlformats.org/drawingml/2006/main">
               <a:ext uri="{FF2B5EF4-FFF2-40B4-BE49-F238E27FC236}">
-                <a16:creationId xmlns:a16="http://schemas.microsoft.com/office/drawing/2014/main" id="{5E12F866-0254-4E03-8771-3E4AA044F272}"/>
+                <a16:creationId xmlns:a16="http://schemas.microsoft.com/office/drawing/2014/main" id="{A7379AF7-2753-4E79-BE8C-BB053EF0FC80}"/>
               </a:ext>
             </a:extLst>
           </p:cNvPr>
@@ -12129,7 +12137,7 @@
           <p:cNvPr id="7" name="">
             <a:extLst xmlns:a="http://schemas.openxmlformats.org/drawingml/2006/main">
               <a:ext uri="{FF2B5EF4-FFF2-40B4-BE49-F238E27FC236}">
-                <a16:creationId xmlns:a16="http://schemas.microsoft.com/office/drawing/2014/main" id="{68F72638-5982-4E5C-983B-44164FC2C34B}"/>
+                <a16:creationId xmlns:a16="http://schemas.microsoft.com/office/drawing/2014/main" id="{6154FBD0-C525-4385-A8E4-5ECFFA975A5D}"/>
               </a:ext>
             </a:extLst>
           </p:cNvPr>
@@ -12161,7 +12169,7 @@
           <p:cNvPr id="8" name="">
             <a:extLst xmlns:a="http://schemas.openxmlformats.org/drawingml/2006/main">
               <a:ext uri="{FF2B5EF4-FFF2-40B4-BE49-F238E27FC236}">
-                <a16:creationId xmlns:a16="http://schemas.microsoft.com/office/drawing/2014/main" id="{1F2D9DFF-A5E7-44EB-A199-9E7A23017927}"/>
+                <a16:creationId xmlns:a16="http://schemas.microsoft.com/office/drawing/2014/main" id="{C9E2EF6E-BF18-48D4-BE6D-D96689ADFFA4}"/>
               </a:ext>
             </a:extLst>
           </p:cNvPr>
@@ -12218,7 +12226,7 @@
           <p:cNvPr id="9" name="">
             <a:extLst xmlns:a="http://schemas.openxmlformats.org/drawingml/2006/main">
               <a:ext uri="{FF2B5EF4-FFF2-40B4-BE49-F238E27FC236}">
-                <a16:creationId xmlns:a16="http://schemas.microsoft.com/office/drawing/2014/main" id="{148C2F23-42C3-46DE-B937-16A80A3F22FA}"/>
+                <a16:creationId xmlns:a16="http://schemas.microsoft.com/office/drawing/2014/main" id="{C1946655-4C22-436F-B229-6A7C72440AB1}"/>
               </a:ext>
             </a:extLst>
           </p:cNvPr>
@@ -12275,7 +12283,7 @@
           <p:cNvPr id="10" name="">
             <a:extLst xmlns:a="http://schemas.openxmlformats.org/drawingml/2006/main">
               <a:ext uri="{FF2B5EF4-FFF2-40B4-BE49-F238E27FC236}">
-                <a16:creationId xmlns:a16="http://schemas.microsoft.com/office/drawing/2014/main" id="{C280A76A-65C0-47E5-810D-60C98B9E6F68}"/>
+                <a16:creationId xmlns:a16="http://schemas.microsoft.com/office/drawing/2014/main" id="{151B46B1-FFE5-4F70-8358-F92BC85F6875}"/>
               </a:ext>
             </a:extLst>
           </p:cNvPr>
@@ -12309,7 +12317,7 @@
           <p:cNvPr id="11" name="">
             <a:extLst xmlns:a="http://schemas.openxmlformats.org/drawingml/2006/main">
               <a:ext uri="{FF2B5EF4-FFF2-40B4-BE49-F238E27FC236}">
-                <a16:creationId xmlns:a16="http://schemas.microsoft.com/office/drawing/2014/main" id="{65A585C5-37F0-4AA5-8D27-B6F20FA763F0}"/>
+                <a16:creationId xmlns:a16="http://schemas.microsoft.com/office/drawing/2014/main" id="{DFCACC99-5C05-4BB2-9DD9-7C79E15D2B2B}"/>
               </a:ext>
             </a:extLst>
           </p:cNvPr>
@@ -12341,7 +12349,7 @@
           <p:cNvPr id="12" name="">
             <a:extLst xmlns:a="http://schemas.openxmlformats.org/drawingml/2006/main">
               <a:ext uri="{FF2B5EF4-FFF2-40B4-BE49-F238E27FC236}">
-                <a16:creationId xmlns:a16="http://schemas.microsoft.com/office/drawing/2014/main" id="{0F5B44D8-36BB-48AA-A56F-3D69664E2DED}"/>
+                <a16:creationId xmlns:a16="http://schemas.microsoft.com/office/drawing/2014/main" id="{EFA8913E-1BEE-4BF2-9140-2519124ECC9B}"/>
               </a:ext>
             </a:extLst>
           </p:cNvPr>
@@ -12398,7 +12406,7 @@
           <p:cNvPr id="13" name="">
             <a:extLst xmlns:a="http://schemas.openxmlformats.org/drawingml/2006/main">
               <a:ext uri="{FF2B5EF4-FFF2-40B4-BE49-F238E27FC236}">
-                <a16:creationId xmlns:a16="http://schemas.microsoft.com/office/drawing/2014/main" id="{50A2F324-AE78-456F-BD43-989045ED4EC5}"/>
+                <a16:creationId xmlns:a16="http://schemas.microsoft.com/office/drawing/2014/main" id="{F522ACA4-58EF-413A-8956-C53345EF0FE3}"/>
               </a:ext>
             </a:extLst>
           </p:cNvPr>
@@ -12455,7 +12463,7 @@
           <p:cNvPr id="14" name="">
             <a:extLst xmlns:a="http://schemas.openxmlformats.org/drawingml/2006/main">
               <a:ext uri="{FF2B5EF4-FFF2-40B4-BE49-F238E27FC236}">
-                <a16:creationId xmlns:a16="http://schemas.microsoft.com/office/drawing/2014/main" id="{A6318F22-6391-41E8-A2B0-F71CFF755BD1}"/>
+                <a16:creationId xmlns:a16="http://schemas.microsoft.com/office/drawing/2014/main" id="{7721A4BA-5139-4DAA-85FA-C7EB693B7FE6}"/>
               </a:ext>
             </a:extLst>
           </p:cNvPr>
@@ -12489,7 +12497,7 @@
           <p:cNvPr id="15" name="">
             <a:extLst xmlns:a="http://schemas.openxmlformats.org/drawingml/2006/main">
               <a:ext uri="{FF2B5EF4-FFF2-40B4-BE49-F238E27FC236}">
-                <a16:creationId xmlns:a16="http://schemas.microsoft.com/office/drawing/2014/main" id="{7F0A14F7-2D02-4B7B-874A-43241219E134}"/>
+                <a16:creationId xmlns:a16="http://schemas.microsoft.com/office/drawing/2014/main" id="{168016D5-221B-41B6-82EE-9D22E87EA5C4}"/>
               </a:ext>
             </a:extLst>
           </p:cNvPr>
@@ -12521,7 +12529,7 @@
           <p:cNvPr id="16" name="">
             <a:extLst xmlns:a="http://schemas.openxmlformats.org/drawingml/2006/main">
               <a:ext uri="{FF2B5EF4-FFF2-40B4-BE49-F238E27FC236}">
-                <a16:creationId xmlns:a16="http://schemas.microsoft.com/office/drawing/2014/main" id="{26091CE4-9F5B-4E81-A77F-9C3AD0E3BBFC}"/>
+                <a16:creationId xmlns:a16="http://schemas.microsoft.com/office/drawing/2014/main" id="{4D7F7188-1376-486C-91FF-E3094D3D16A9}"/>
               </a:ext>
             </a:extLst>
           </p:cNvPr>
@@ -12578,7 +12586,7 @@
           <p:cNvPr id="17" name="">
             <a:extLst xmlns:a="http://schemas.openxmlformats.org/drawingml/2006/main">
               <a:ext uri="{FF2B5EF4-FFF2-40B4-BE49-F238E27FC236}">
-                <a16:creationId xmlns:a16="http://schemas.microsoft.com/office/drawing/2014/main" id="{0B307EC0-7421-404F-96B3-D63DC2A39AD8}"/>
+                <a16:creationId xmlns:a16="http://schemas.microsoft.com/office/drawing/2014/main" id="{0823B4FF-3B9E-48E6-8772-0289A62F6B3B}"/>
               </a:ext>
             </a:extLst>
           </p:cNvPr>
@@ -12635,7 +12643,7 @@
           <p:cNvPr id="18" name="">
             <a:extLst xmlns:a="http://schemas.openxmlformats.org/drawingml/2006/main">
               <a:ext uri="{FF2B5EF4-FFF2-40B4-BE49-F238E27FC236}">
-                <a16:creationId xmlns:a16="http://schemas.microsoft.com/office/drawing/2014/main" id="{52D95F41-1342-433E-8632-C4856B9E35B3}"/>
+                <a16:creationId xmlns:a16="http://schemas.microsoft.com/office/drawing/2014/main" id="{421476CF-5EFB-4EA5-83A9-4EB92D4C4A83}"/>
               </a:ext>
             </a:extLst>
           </p:cNvPr>
@@ -12669,7 +12677,7 @@
           <p:cNvPr id="19" name="">
             <a:extLst xmlns:a="http://schemas.openxmlformats.org/drawingml/2006/main">
               <a:ext uri="{FF2B5EF4-FFF2-40B4-BE49-F238E27FC236}">
-                <a16:creationId xmlns:a16="http://schemas.microsoft.com/office/drawing/2014/main" id="{DB981CE4-1113-45AF-9B3B-EFC60DAD744E}"/>
+                <a16:creationId xmlns:a16="http://schemas.microsoft.com/office/drawing/2014/main" id="{83A30564-D519-451A-9782-92935F7F387C}"/>
               </a:ext>
             </a:extLst>
           </p:cNvPr>
@@ -12701,7 +12709,7 @@
           <p:cNvPr id="20" name="">
             <a:extLst xmlns:a="http://schemas.openxmlformats.org/drawingml/2006/main">
               <a:ext uri="{FF2B5EF4-FFF2-40B4-BE49-F238E27FC236}">
-                <a16:creationId xmlns:a16="http://schemas.microsoft.com/office/drawing/2014/main" id="{126A2F36-9E60-4314-A5B0-FFBDF6418063}"/>
+                <a16:creationId xmlns:a16="http://schemas.microsoft.com/office/drawing/2014/main" id="{AF30C00D-1B2D-459F-881F-F37631FBD2A3}"/>
               </a:ext>
             </a:extLst>
           </p:cNvPr>
@@ -12758,7 +12766,7 @@
           <p:cNvPr id="21" name="">
             <a:extLst xmlns:a="http://schemas.openxmlformats.org/drawingml/2006/main">
               <a:ext uri="{FF2B5EF4-FFF2-40B4-BE49-F238E27FC236}">
-                <a16:creationId xmlns:a16="http://schemas.microsoft.com/office/drawing/2014/main" id="{F424EE7B-55D9-4260-B1B1-85FCD330C8C6}"/>
+                <a16:creationId xmlns:a16="http://schemas.microsoft.com/office/drawing/2014/main" id="{5C547345-7104-4701-932D-802CA5D74B66}"/>
               </a:ext>
             </a:extLst>
           </p:cNvPr>
@@ -12815,7 +12823,7 @@
           <p:cNvPr id="22" name="">
             <a:extLst xmlns:a="http://schemas.openxmlformats.org/drawingml/2006/main">
               <a:ext uri="{FF2B5EF4-FFF2-40B4-BE49-F238E27FC236}">
-                <a16:creationId xmlns:a16="http://schemas.microsoft.com/office/drawing/2014/main" id="{36836C56-C963-45D3-BAF1-129ACB180AA5}"/>
+                <a16:creationId xmlns:a16="http://schemas.microsoft.com/office/drawing/2014/main" id="{C737A31E-E423-46EF-A9BA-621FC9764BBB}"/>
               </a:ext>
             </a:extLst>
           </p:cNvPr>
@@ -12870,7 +12878,7 @@
     </p:spTree>
     <p:extLst>
       <p:ext uri="{BB962C8B-B14F-4D97-AF65-F5344CB8AC3E}">
-        <p14:creationId xmlns:p14="http://schemas.microsoft.com/office/powerpoint/2010/main" val="1560298358"/>
+        <p14:creationId xmlns:p14="http://schemas.microsoft.com/office/powerpoint/2010/main" val="2065667135"/>
       </p:ext>
     </p:extLst>
   </p:cSld>
@@ -13071,7 +13079,7 @@
           <p:cNvPr id="22" name="">
             <a:extLst xmlns:a="http://schemas.openxmlformats.org/drawingml/2006/main">
               <a:ext uri="{FF2B5EF4-FFF2-40B4-BE49-F238E27FC236}">
-                <a16:creationId xmlns:a16="http://schemas.microsoft.com/office/drawing/2014/main" id="{A7B5AD9F-309D-46B7-BCAD-8C07631FAAAF}"/>
+                <a16:creationId xmlns:a16="http://schemas.microsoft.com/office/drawing/2014/main" id="{65265AA3-9FAD-404F-9842-BE314DC07A53}"/>
               </a:ext>
             </a:extLst>
           </p:cNvPr>
@@ -13103,7 +13111,7 @@
           <p:cNvPr id="2" name="">
             <a:extLst xmlns:a="http://schemas.openxmlformats.org/drawingml/2006/main">
               <a:ext uri="{FF2B5EF4-FFF2-40B4-BE49-F238E27FC236}">
-                <a16:creationId xmlns:a16="http://schemas.microsoft.com/office/drawing/2014/main" id="{6A2E8044-58E4-413B-A5A9-F83848BC9831}"/>
+                <a16:creationId xmlns:a16="http://schemas.microsoft.com/office/drawing/2014/main" id="{86F9AC97-3B51-4BB6-B6DE-E5CEBD02F2FA}"/>
               </a:ext>
             </a:extLst>
           </p:cNvPr>
@@ -13160,7 +13168,7 @@
           <p:cNvPr id="3" name="">
             <a:extLst xmlns:a="http://schemas.openxmlformats.org/drawingml/2006/main">
               <a:ext uri="{FF2B5EF4-FFF2-40B4-BE49-F238E27FC236}">
-                <a16:creationId xmlns:a16="http://schemas.microsoft.com/office/drawing/2014/main" id="{49667364-FAE1-4385-8CD7-CC4062F8D4A0}"/>
+                <a16:creationId xmlns:a16="http://schemas.microsoft.com/office/drawing/2014/main" id="{05B2FF70-514F-47FE-8924-D9BBE6509C9A}"/>
               </a:ext>
             </a:extLst>
           </p:cNvPr>
@@ -13192,7 +13200,7 @@
           <p:cNvPr id="4" name="">
             <a:extLst xmlns:a="http://schemas.openxmlformats.org/drawingml/2006/main">
               <a:ext uri="{FF2B5EF4-FFF2-40B4-BE49-F238E27FC236}">
-                <a16:creationId xmlns:a16="http://schemas.microsoft.com/office/drawing/2014/main" id="{A3D0F36D-BC2A-4DF4-B632-65F77F0C2F29}"/>
+                <a16:creationId xmlns:a16="http://schemas.microsoft.com/office/drawing/2014/main" id="{619B7F07-9FAB-4BE1-93A6-67B9546AF0C4}"/>
               </a:ext>
             </a:extLst>
           </p:cNvPr>
@@ -13249,7 +13257,7 @@
           <p:cNvPr id="5" name="">
             <a:extLst xmlns:a="http://schemas.openxmlformats.org/drawingml/2006/main">
               <a:ext uri="{FF2B5EF4-FFF2-40B4-BE49-F238E27FC236}">
-                <a16:creationId xmlns:a16="http://schemas.microsoft.com/office/drawing/2014/main" id="{838ED32C-4248-42DA-852E-F93FD6C30F2D}"/>
+                <a16:creationId xmlns:a16="http://schemas.microsoft.com/office/drawing/2014/main" id="{90FAA1E0-EF6D-402C-B362-F1ED98A657C7}"/>
               </a:ext>
             </a:extLst>
           </p:cNvPr>
@@ -13306,7 +13314,7 @@
           <p:cNvPr id="6" name="">
             <a:extLst xmlns:a="http://schemas.openxmlformats.org/drawingml/2006/main">
               <a:ext uri="{FF2B5EF4-FFF2-40B4-BE49-F238E27FC236}">
-                <a16:creationId xmlns:a16="http://schemas.microsoft.com/office/drawing/2014/main" id="{DA76AEEF-3B39-4707-8411-9FBA5357D506}"/>
+                <a16:creationId xmlns:a16="http://schemas.microsoft.com/office/drawing/2014/main" id="{5815DBB0-6459-460A-8794-8F9874D8074D}"/>
               </a:ext>
             </a:extLst>
           </p:cNvPr>
@@ -13363,7 +13371,7 @@
           <p:cNvPr id="7" name="">
             <a:extLst xmlns:a="http://schemas.openxmlformats.org/drawingml/2006/main">
               <a:ext uri="{FF2B5EF4-FFF2-40B4-BE49-F238E27FC236}">
-                <a16:creationId xmlns:a16="http://schemas.microsoft.com/office/drawing/2014/main" id="{8FFDC8C7-2013-4B8C-80EA-770FB884C3DE}"/>
+                <a16:creationId xmlns:a16="http://schemas.microsoft.com/office/drawing/2014/main" id="{DA259382-28B4-4E5D-BCE1-028B14B1D2C3}"/>
               </a:ext>
             </a:extLst>
           </p:cNvPr>
@@ -13395,7 +13403,7 @@
           <p:cNvPr id="8" name="">
             <a:extLst xmlns:a="http://schemas.openxmlformats.org/drawingml/2006/main">
               <a:ext uri="{FF2B5EF4-FFF2-40B4-BE49-F238E27FC236}">
-                <a16:creationId xmlns:a16="http://schemas.microsoft.com/office/drawing/2014/main" id="{2912982A-CC52-4194-A3FC-F350AF3CD045}"/>
+                <a16:creationId xmlns:a16="http://schemas.microsoft.com/office/drawing/2014/main" id="{C142F649-17E7-4C14-B8FF-DCA712EC2D95}"/>
               </a:ext>
             </a:extLst>
           </p:cNvPr>
@@ -13452,7 +13460,7 @@
           <p:cNvPr id="9" name="">
             <a:extLst xmlns:a="http://schemas.openxmlformats.org/drawingml/2006/main">
               <a:ext uri="{FF2B5EF4-FFF2-40B4-BE49-F238E27FC236}">
-                <a16:creationId xmlns:a16="http://schemas.microsoft.com/office/drawing/2014/main" id="{D7989D65-467C-418C-9EC8-2469EB002F8C}"/>
+                <a16:creationId xmlns:a16="http://schemas.microsoft.com/office/drawing/2014/main" id="{704E1D3B-B1BD-4B5D-A5CF-7166DD5A9F10}"/>
               </a:ext>
             </a:extLst>
           </p:cNvPr>
@@ -13509,7 +13517,7 @@
           <p:cNvPr id="10" name="">
             <a:extLst xmlns:a="http://schemas.openxmlformats.org/drawingml/2006/main">
               <a:ext uri="{FF2B5EF4-FFF2-40B4-BE49-F238E27FC236}">
-                <a16:creationId xmlns:a16="http://schemas.microsoft.com/office/drawing/2014/main" id="{20B75F67-186B-415A-A563-2DA9E476CAFE}"/>
+                <a16:creationId xmlns:a16="http://schemas.microsoft.com/office/drawing/2014/main" id="{50659049-143E-4776-AB64-81AD0DE5A8B3}"/>
               </a:ext>
             </a:extLst>
           </p:cNvPr>
@@ -13543,7 +13551,7 @@
           <p:cNvPr id="11" name="">
             <a:extLst xmlns:a="http://schemas.openxmlformats.org/drawingml/2006/main">
               <a:ext uri="{FF2B5EF4-FFF2-40B4-BE49-F238E27FC236}">
-                <a16:creationId xmlns:a16="http://schemas.microsoft.com/office/drawing/2014/main" id="{74257C55-8CED-4599-932B-D96C79AC72E4}"/>
+                <a16:creationId xmlns:a16="http://schemas.microsoft.com/office/drawing/2014/main" id="{1E8A508C-F7BA-497C-B1C4-11C7836D7536}"/>
               </a:ext>
             </a:extLst>
           </p:cNvPr>
@@ -13575,7 +13583,7 @@
           <p:cNvPr id="12" name="">
             <a:extLst xmlns:a="http://schemas.openxmlformats.org/drawingml/2006/main">
               <a:ext uri="{FF2B5EF4-FFF2-40B4-BE49-F238E27FC236}">
-                <a16:creationId xmlns:a16="http://schemas.microsoft.com/office/drawing/2014/main" id="{054566FC-0ECA-4C91-A898-0D673E599B50}"/>
+                <a16:creationId xmlns:a16="http://schemas.microsoft.com/office/drawing/2014/main" id="{CAFFB867-1A06-4B1A-9618-3D2C580B8518}"/>
               </a:ext>
             </a:extLst>
           </p:cNvPr>
@@ -13632,7 +13640,7 @@
           <p:cNvPr id="13" name="">
             <a:extLst xmlns:a="http://schemas.openxmlformats.org/drawingml/2006/main">
               <a:ext uri="{FF2B5EF4-FFF2-40B4-BE49-F238E27FC236}">
-                <a16:creationId xmlns:a16="http://schemas.microsoft.com/office/drawing/2014/main" id="{7B3E0633-AA5E-477B-A81D-9FA7FDCB6979}"/>
+                <a16:creationId xmlns:a16="http://schemas.microsoft.com/office/drawing/2014/main" id="{B418B74A-3371-4D7F-B69C-509BE85D2ED7}"/>
               </a:ext>
             </a:extLst>
           </p:cNvPr>
@@ -13689,7 +13697,7 @@
           <p:cNvPr id="14" name="">
             <a:extLst xmlns:a="http://schemas.openxmlformats.org/drawingml/2006/main">
               <a:ext uri="{FF2B5EF4-FFF2-40B4-BE49-F238E27FC236}">
-                <a16:creationId xmlns:a16="http://schemas.microsoft.com/office/drawing/2014/main" id="{C06E4DE1-714B-48AA-8642-FD78144064E4}"/>
+                <a16:creationId xmlns:a16="http://schemas.microsoft.com/office/drawing/2014/main" id="{2CAE91E1-0A33-4189-8AF6-DEE35B999104}"/>
               </a:ext>
             </a:extLst>
           </p:cNvPr>
@@ -13723,7 +13731,7 @@
           <p:cNvPr id="15" name="">
             <a:extLst xmlns:a="http://schemas.openxmlformats.org/drawingml/2006/main">
               <a:ext uri="{FF2B5EF4-FFF2-40B4-BE49-F238E27FC236}">
-                <a16:creationId xmlns:a16="http://schemas.microsoft.com/office/drawing/2014/main" id="{E56C5102-D50A-46FA-8909-97FB1C71719F}"/>
+                <a16:creationId xmlns:a16="http://schemas.microsoft.com/office/drawing/2014/main" id="{E25A06A6-34B4-455D-A3D4-BBEA9DF42DB2}"/>
               </a:ext>
             </a:extLst>
           </p:cNvPr>
@@ -13755,7 +13763,7 @@
           <p:cNvPr id="16" name="">
             <a:extLst xmlns:a="http://schemas.openxmlformats.org/drawingml/2006/main">
               <a:ext uri="{FF2B5EF4-FFF2-40B4-BE49-F238E27FC236}">
-                <a16:creationId xmlns:a16="http://schemas.microsoft.com/office/drawing/2014/main" id="{AE43DD2F-9F44-48C8-8444-51434D958AFD}"/>
+                <a16:creationId xmlns:a16="http://schemas.microsoft.com/office/drawing/2014/main" id="{E625C169-A2E9-4C48-AE6D-90362A9B4B30}"/>
               </a:ext>
             </a:extLst>
           </p:cNvPr>
@@ -13812,7 +13820,7 @@
           <p:cNvPr id="17" name="">
             <a:extLst xmlns:a="http://schemas.openxmlformats.org/drawingml/2006/main">
               <a:ext uri="{FF2B5EF4-FFF2-40B4-BE49-F238E27FC236}">
-                <a16:creationId xmlns:a16="http://schemas.microsoft.com/office/drawing/2014/main" id="{E2909FED-0D68-4DD6-BB5F-D905AC19A534}"/>
+                <a16:creationId xmlns:a16="http://schemas.microsoft.com/office/drawing/2014/main" id="{49603454-8346-4900-A332-10A54C6F3517}"/>
               </a:ext>
             </a:extLst>
           </p:cNvPr>
@@ -13869,7 +13877,7 @@
           <p:cNvPr id="18" name="">
             <a:extLst xmlns:a="http://schemas.openxmlformats.org/drawingml/2006/main">
               <a:ext uri="{FF2B5EF4-FFF2-40B4-BE49-F238E27FC236}">
-                <a16:creationId xmlns:a16="http://schemas.microsoft.com/office/drawing/2014/main" id="{99058884-1501-4A5C-A456-063CB17969A5}"/>
+                <a16:creationId xmlns:a16="http://schemas.microsoft.com/office/drawing/2014/main" id="{6786AA4B-3222-4508-AD53-8ACB71D39A3E}"/>
               </a:ext>
             </a:extLst>
           </p:cNvPr>
@@ -13903,7 +13911,7 @@
           <p:cNvPr id="19" name="">
             <a:extLst xmlns:a="http://schemas.openxmlformats.org/drawingml/2006/main">
               <a:ext uri="{FF2B5EF4-FFF2-40B4-BE49-F238E27FC236}">
-                <a16:creationId xmlns:a16="http://schemas.microsoft.com/office/drawing/2014/main" id="{26A90CC6-9DA6-4318-901E-52E0ADAAB36E}"/>
+                <a16:creationId xmlns:a16="http://schemas.microsoft.com/office/drawing/2014/main" id="{2D44000B-8A7A-4047-82E2-3C4B0C3F513E}"/>
               </a:ext>
             </a:extLst>
           </p:cNvPr>
@@ -13935,7 +13943,7 @@
           <p:cNvPr id="20" name="">
             <a:extLst xmlns:a="http://schemas.openxmlformats.org/drawingml/2006/main">
               <a:ext uri="{FF2B5EF4-FFF2-40B4-BE49-F238E27FC236}">
-                <a16:creationId xmlns:a16="http://schemas.microsoft.com/office/drawing/2014/main" id="{98A6692C-748D-406E-AEA6-128F0079EA79}"/>
+                <a16:creationId xmlns:a16="http://schemas.microsoft.com/office/drawing/2014/main" id="{34D04C00-4703-442D-949E-CD31E5737014}"/>
               </a:ext>
             </a:extLst>
           </p:cNvPr>
@@ -13992,7 +14000,7 @@
           <p:cNvPr id="21" name="">
             <a:extLst xmlns:a="http://schemas.openxmlformats.org/drawingml/2006/main">
               <a:ext uri="{FF2B5EF4-FFF2-40B4-BE49-F238E27FC236}">
-                <a16:creationId xmlns:a16="http://schemas.microsoft.com/office/drawing/2014/main" id="{1C6EB4EE-CDB2-418A-A420-F1750507B2F7}"/>
+                <a16:creationId xmlns:a16="http://schemas.microsoft.com/office/drawing/2014/main" id="{6AD73983-DF5B-4C87-B4D5-48B6B1359929}"/>
               </a:ext>
             </a:extLst>
           </p:cNvPr>
@@ -14047,7 +14055,7 @@
     </p:spTree>
     <p:extLst>
       <p:ext uri="{BB962C8B-B14F-4D97-AF65-F5344CB8AC3E}">
-        <p14:creationId xmlns:p14="http://schemas.microsoft.com/office/powerpoint/2010/main" val="1883555182"/>
+        <p14:creationId xmlns:p14="http://schemas.microsoft.com/office/powerpoint/2010/main" val="1193433645"/>
       </p:ext>
     </p:extLst>
   </p:cSld>
